--- a/docs/poster/pptx/UG_ICT_P01_poster.pptx
+++ b/docs/poster/pptx/UG_ICT_P01_poster.pptx
@@ -905,7 +905,7 @@
         </p:nvSpPr>
         <p:spPr>
           <a:xfrm>
-            <a:off x="18504000" y="12960000"/>
+            <a:off x="18504000" y="11880000"/>
             <a:ext cx="7920000" cy="7920000"/>
           </a:xfrm>
           <a:prstGeom prst="ellipse">
@@ -927,7 +927,7 @@
         </p:nvSpPr>
         <p:spPr>
           <a:xfrm>
-            <a:off x="-5040000" y="21996000"/>
+            <a:off x="-5040000" y="20160000"/>
             <a:ext cx="7200000" cy="7200000"/>
           </a:xfrm>
           <a:prstGeom prst="ellipse">
@@ -1209,7 +1209,7 @@
         </p:nvSpPr>
         <p:spPr>
           <a:xfrm>
-            <a:off x="1008000" y="4896000"/>
+            <a:off x="1008000" y="5328000"/>
             <a:ext cx="13680000" cy="864000"/>
           </a:xfrm>
           <a:prstGeom prst="rect">
@@ -1262,7 +1262,7 @@
         </p:nvSpPr>
         <p:spPr>
           <a:xfrm>
-            <a:off x="13680000" y="4896000"/>
+            <a:off x="13680000" y="5328000"/>
             <a:ext cx="6696000" cy="864000"/>
           </a:xfrm>
           <a:prstGeom prst="rect">
@@ -1295,13 +1295,13 @@
       </p:sp>
       <p:sp>
         <p:nvSpPr>
-          <p:cNvPr id="13" name="Text 8"/>
+          <p:cNvPr id="13" name="Problem lead"/>
           <p:cNvSpPr txBox="1"/>
           <p:nvPr/>
         </p:nvSpPr>
         <p:spPr>
           <a:xfrm>
-            <a:off x="1008000" y="5940000"/>
+            <a:off x="1008000" y="6444000"/>
             <a:ext cx="19368000" cy="504000"/>
           </a:xfrm>
           <a:prstGeom prst="rect">
@@ -1326,7 +1326,7 @@
                 <a:ea typeface="Arial" pitchFamily="34" charset="-122"/>
                 <a:cs typeface="Arial" pitchFamily="34" charset="-120"/>
               </a:rPr>
-              <a:t>Schools manage thousands of shared assets with spreadsheets, paper sign-out sheets and memory.</a:t>
+              <a:t>Schools track thousands of shared items with spreadsheets, paper and memory.</a:t>
             </a:r>
             <a:endParaRPr lang="en-US" sz="3000" dirty="0"/>
           </a:p>
@@ -1340,12 +1340,12 @@
         </p:nvSpPr>
         <p:spPr>
           <a:xfrm>
-            <a:off x="1008000" y="6588000"/>
-            <a:ext cx="4707000" cy="1476000"/>
+            <a:off x="1008000" y="7200000"/>
+            <a:ext cx="4716000" cy="1692000"/>
           </a:xfrm>
           <a:prstGeom prst="roundRect">
             <a:avLst>
-              <a:gd name="adj" fmla="val 4878"/>
+              <a:gd name="adj" fmla="val 4255"/>
             </a:avLst>
           </a:prstGeom>
           <a:solidFill>
@@ -1361,41 +1361,14 @@
       </p:sp>
       <p:sp>
         <p:nvSpPr>
-          <p:cNvPr id="15" name="Shape 10"/>
-          <p:cNvSpPr/>
-          <p:nvPr/>
-        </p:nvSpPr>
-        <p:spPr>
-          <a:xfrm>
-            <a:off x="1008000" y="6588000"/>
-            <a:ext cx="90000" cy="1476000"/>
-          </a:xfrm>
-          <a:prstGeom prst="rect">
-            <a:avLst>
-              <a:gd name="adj" fmla="val 120000"/>
-            </a:avLst>
-          </a:prstGeom>
-          <a:solidFill>
-            <a:srgbClr val="D62598"/>
-          </a:solidFill>
-          <a:ln w="12700">
-            <a:solidFill>
-              <a:srgbClr val="D62598"/>
-            </a:solidFill>
-            <a:prstDash val="solid"/>
-          </a:ln>
-        </p:spPr>
-      </p:sp>
-      <p:sp>
-        <p:nvSpPr>
-          <p:cNvPr id="16" name="Pain: Items go missing"/>
+          <p:cNvPr id="15" name="Pain: Items go missing"/>
           <p:cNvSpPr txBox="1"/>
           <p:nvPr/>
         </p:nvSpPr>
         <p:spPr>
           <a:xfrm>
-            <a:off x="1260000" y="6696000"/>
-            <a:ext cx="4347000" cy="1296000"/>
+            <a:off x="1224000" y="7380000"/>
+            <a:ext cx="4320000" cy="1404000"/>
           </a:xfrm>
           <a:prstGeom prst="rect">
             <a:avLst/>
@@ -1450,18 +1423,18 @@
       </p:sp>
       <p:sp>
         <p:nvSpPr>
-          <p:cNvPr id="17" name="Shape 12"/>
+          <p:cNvPr id="16" name="Shape 11"/>
           <p:cNvSpPr/>
           <p:nvPr/>
         </p:nvSpPr>
         <p:spPr>
           <a:xfrm>
-            <a:off x="5895000" y="6588000"/>
-            <a:ext cx="4707000" cy="1476000"/>
+            <a:off x="5904000" y="7200000"/>
+            <a:ext cx="4716000" cy="1692000"/>
           </a:xfrm>
           <a:prstGeom prst="roundRect">
             <a:avLst>
-              <a:gd name="adj" fmla="val 4878"/>
+              <a:gd name="adj" fmla="val 4255"/>
             </a:avLst>
           </a:prstGeom>
           <a:solidFill>
@@ -1477,41 +1450,14 @@
       </p:sp>
       <p:sp>
         <p:nvSpPr>
-          <p:cNvPr id="18" name="Shape 13"/>
-          <p:cNvSpPr/>
-          <p:nvPr/>
-        </p:nvSpPr>
-        <p:spPr>
-          <a:xfrm>
-            <a:off x="5895000" y="6588000"/>
-            <a:ext cx="90000" cy="1476000"/>
-          </a:xfrm>
-          <a:prstGeom prst="rect">
-            <a:avLst>
-              <a:gd name="adj" fmla="val 120000"/>
-            </a:avLst>
-          </a:prstGeom>
-          <a:solidFill>
-            <a:srgbClr val="D62598"/>
-          </a:solidFill>
-          <a:ln w="12700">
-            <a:solidFill>
-              <a:srgbClr val="D62598"/>
-            </a:solidFill>
-            <a:prstDash val="solid"/>
-          </a:ln>
-        </p:spPr>
-      </p:sp>
-      <p:sp>
-        <p:nvSpPr>
-          <p:cNvPr id="19" name="Pain: No single view"/>
+          <p:cNvPr id="17" name="Pain: Stock expires"/>
           <p:cNvSpPr txBox="1"/>
           <p:nvPr/>
         </p:nvSpPr>
         <p:spPr>
           <a:xfrm>
-            <a:off x="6147000" y="6696000"/>
-            <a:ext cx="4347000" cy="1296000"/>
+            <a:off x="6120000" y="7380000"/>
+            <a:ext cx="4320000" cy="1404000"/>
           </a:xfrm>
           <a:prstGeom prst="rect">
             <a:avLst/>
@@ -1538,7 +1484,7 @@
                 <a:ea typeface="Arial" pitchFamily="34" charset="-122"/>
                 <a:cs typeface="Arial" pitchFamily="34" charset="-120"/>
               </a:rPr>
-              <a:t>No single view</a:t>
+              <a:t>Stock expires</a:t>
             </a:r>
             <a:endParaRPr lang="en-US" sz="2700" dirty="0"/>
           </a:p>
@@ -1558,7 +1504,7 @@
                 <a:ea typeface="Arial" pitchFamily="34" charset="-122"/>
                 <a:cs typeface="Arial" pitchFamily="34" charset="-120"/>
               </a:rPr>
-              <a:t>Stock is spread across rooms and campuses.</a:t>
+              <a:t>First-aid kits and chemicals go out of date.</a:t>
             </a:r>
             <a:endParaRPr lang="en-US" sz="2700" dirty="0"/>
           </a:p>
@@ -1566,18 +1512,18 @@
       </p:sp>
       <p:sp>
         <p:nvSpPr>
-          <p:cNvPr id="20" name="Shape 15"/>
+          <p:cNvPr id="18" name="Shape 13"/>
           <p:cNvSpPr/>
           <p:nvPr/>
         </p:nvSpPr>
         <p:spPr>
           <a:xfrm>
-            <a:off x="10782000" y="6588000"/>
-            <a:ext cx="4707000" cy="1476000"/>
+            <a:off x="1008000" y="9036000"/>
+            <a:ext cx="4716000" cy="1692000"/>
           </a:xfrm>
           <a:prstGeom prst="roundRect">
             <a:avLst>
-              <a:gd name="adj" fmla="val 4878"/>
+              <a:gd name="adj" fmla="val 4255"/>
             </a:avLst>
           </a:prstGeom>
           <a:solidFill>
@@ -1593,41 +1539,14 @@
       </p:sp>
       <p:sp>
         <p:nvSpPr>
-          <p:cNvPr id="21" name="Shape 16"/>
-          <p:cNvSpPr/>
-          <p:nvPr/>
-        </p:nvSpPr>
-        <p:spPr>
-          <a:xfrm>
-            <a:off x="10782000" y="6588000"/>
-            <a:ext cx="90000" cy="1476000"/>
-          </a:xfrm>
-          <a:prstGeom prst="rect">
-            <a:avLst>
-              <a:gd name="adj" fmla="val 120000"/>
-            </a:avLst>
-          </a:prstGeom>
-          <a:solidFill>
-            <a:srgbClr val="D62598"/>
-          </a:solidFill>
-          <a:ln w="12700">
-            <a:solidFill>
-              <a:srgbClr val="D62598"/>
-            </a:solidFill>
-            <a:prstDash val="solid"/>
-          </a:ln>
-        </p:spPr>
-      </p:sp>
-      <p:sp>
-        <p:nvSpPr>
-          <p:cNvPr id="22" name="Pain: Stock expires"/>
+          <p:cNvPr id="19" name="Pain: No single view"/>
           <p:cNvSpPr txBox="1"/>
           <p:nvPr/>
         </p:nvSpPr>
         <p:spPr>
           <a:xfrm>
-            <a:off x="11034000" y="6696000"/>
-            <a:ext cx="4347000" cy="1296000"/>
+            <a:off x="1224000" y="9216000"/>
+            <a:ext cx="4320000" cy="1404000"/>
           </a:xfrm>
           <a:prstGeom prst="rect">
             <a:avLst/>
@@ -1654,7 +1573,7 @@
                 <a:ea typeface="Arial" pitchFamily="34" charset="-122"/>
                 <a:cs typeface="Arial" pitchFamily="34" charset="-120"/>
               </a:rPr>
-              <a:t>Stock expires</a:t>
+              <a:t>No single view</a:t>
             </a:r>
             <a:endParaRPr lang="en-US" sz="2700" dirty="0"/>
           </a:p>
@@ -1674,7 +1593,7 @@
                 <a:ea typeface="Arial" pitchFamily="34" charset="-122"/>
                 <a:cs typeface="Arial" pitchFamily="34" charset="-120"/>
               </a:rPr>
-              <a:t>First-aid kits and chemicals go out of date.</a:t>
+              <a:t>Stock is spread across rooms and campuses.</a:t>
             </a:r>
             <a:endParaRPr lang="en-US" sz="2700" dirty="0"/>
           </a:p>
@@ -1682,18 +1601,18 @@
       </p:sp>
       <p:sp>
         <p:nvSpPr>
-          <p:cNvPr id="23" name="Shape 18"/>
+          <p:cNvPr id="20" name="Shape 15"/>
           <p:cNvSpPr/>
           <p:nvPr/>
         </p:nvSpPr>
         <p:spPr>
           <a:xfrm>
-            <a:off x="15669000" y="6588000"/>
-            <a:ext cx="4707000" cy="1476000"/>
+            <a:off x="5904000" y="9036000"/>
+            <a:ext cx="4716000" cy="1692000"/>
           </a:xfrm>
           <a:prstGeom prst="roundRect">
             <a:avLst>
-              <a:gd name="adj" fmla="val 4878"/>
+              <a:gd name="adj" fmla="val 4255"/>
             </a:avLst>
           </a:prstGeom>
           <a:solidFill>
@@ -1709,41 +1628,14 @@
       </p:sp>
       <p:sp>
         <p:nvSpPr>
-          <p:cNvPr id="24" name="Shape 19"/>
-          <p:cNvSpPr/>
-          <p:nvPr/>
-        </p:nvSpPr>
-        <p:spPr>
-          <a:xfrm>
-            <a:off x="15669000" y="6588000"/>
-            <a:ext cx="90000" cy="1476000"/>
-          </a:xfrm>
-          <a:prstGeom prst="rect">
-            <a:avLst>
-              <a:gd name="adj" fmla="val 120000"/>
-            </a:avLst>
-          </a:prstGeom>
-          <a:solidFill>
-            <a:srgbClr val="D62598"/>
-          </a:solidFill>
-          <a:ln w="12700">
-            <a:solidFill>
-              <a:srgbClr val="D62598"/>
-            </a:solidFill>
-            <a:prstDash val="solid"/>
-          </a:ln>
-        </p:spPr>
-      </p:sp>
-      <p:sp>
-        <p:nvSpPr>
-          <p:cNvPr id="25" name="Pain: One size doesn't fit"/>
+          <p:cNvPr id="21" name="Pain: One size doesn't fit"/>
           <p:cNvSpPr txBox="1"/>
           <p:nvPr/>
         </p:nvSpPr>
         <p:spPr>
           <a:xfrm>
-            <a:off x="15921000" y="6696000"/>
-            <a:ext cx="4347000" cy="1296000"/>
+            <a:off x="6120000" y="9216000"/>
+            <a:ext cx="4320000" cy="1404000"/>
           </a:xfrm>
           <a:prstGeom prst="rect">
             <a:avLst/>
@@ -1798,18 +1690,18 @@
       </p:sp>
       <p:sp>
         <p:nvSpPr>
-          <p:cNvPr id="26" name="Shape 21"/>
+          <p:cNvPr id="22" name="Shape 17"/>
           <p:cNvSpPr/>
           <p:nvPr/>
         </p:nvSpPr>
         <p:spPr>
           <a:xfrm>
-            <a:off x="1008000" y="8244000"/>
-            <a:ext cx="19368000" cy="3708000"/>
+            <a:off x="10980000" y="7200000"/>
+            <a:ext cx="9396000" cy="3528000"/>
           </a:xfrm>
           <a:prstGeom prst="roundRect">
             <a:avLst>
-              <a:gd name="adj" fmla="val 4854"/>
+              <a:gd name="adj" fmla="val 4082"/>
             </a:avLst>
           </a:prstGeom>
           <a:solidFill>
@@ -1825,7 +1717,7 @@
       </p:sp>
       <p:pic>
         <p:nvPicPr>
-          <p:cNvPr id="27" name="Before / after diagram" descr="C:\Users\Aaron\AppData\Local\Temp\claude\C--Users-Aaron-Desktop-ict30017-P01-inventory-management-schools\97f81feb-cc42-48d2-a7dc-9fa67447c472\scratchpad\pptx\before_after.png">    </p:cNvPr>
+          <p:cNvPr id="23" name="Before picture" descr="C:\Users\Aaron\AppData\Local\Temp\claude\C--Users-Aaron-Desktop-ict30017-P01-inventory-management-schools\97f81feb-cc42-48d2-a7dc-9fa67447c472\scratchpad\pptx\before_only.png">    </p:cNvPr>
           <p:cNvPicPr>
             <a:picLocks noChangeAspect="1"/>
           </p:cNvPicPr>
@@ -1839,8 +1731,8 @@
         </p:blipFill>
         <p:spPr>
           <a:xfrm>
-            <a:off x="1224000" y="8352000"/>
-            <a:ext cx="18936000" cy="3402404"/>
+            <a:off x="11160000" y="7272000"/>
+            <a:ext cx="9036000" cy="3373440"/>
           </a:xfrm>
           <a:prstGeom prst="rect">
             <a:avLst/>
@@ -1849,13 +1741,13 @@
       </p:pic>
       <p:sp>
         <p:nvSpPr>
-          <p:cNvPr id="28" name="THE PROCESS heading"/>
+          <p:cNvPr id="24" name="THE PROCESS heading"/>
           <p:cNvSpPr txBox="1"/>
           <p:nvPr/>
         </p:nvSpPr>
         <p:spPr>
           <a:xfrm>
-            <a:off x="1008000" y="12240000"/>
+            <a:off x="1008000" y="11304000"/>
             <a:ext cx="13680000" cy="864000"/>
           </a:xfrm>
           <a:prstGeom prst="rect">
@@ -1902,13 +1794,13 @@
       </p:sp>
       <p:sp>
         <p:nvSpPr>
-          <p:cNvPr id="29" name="Text 23"/>
+          <p:cNvPr id="25" name="Text 19"/>
           <p:cNvSpPr txBox="1"/>
           <p:nvPr/>
         </p:nvSpPr>
         <p:spPr>
           <a:xfrm>
-            <a:off x="13680000" y="12240000"/>
+            <a:off x="13680000" y="11304000"/>
             <a:ext cx="6696000" cy="864000"/>
           </a:xfrm>
           <a:prstGeom prst="rect">
@@ -1941,13 +1833,13 @@
       </p:sp>
       <p:sp>
         <p:nvSpPr>
-          <p:cNvPr id="30" name="Shape 24"/>
+          <p:cNvPr id="26" name="Shape 20"/>
           <p:cNvSpPr/>
           <p:nvPr/>
         </p:nvSpPr>
         <p:spPr>
           <a:xfrm>
-            <a:off x="1008000" y="13752000"/>
+            <a:off x="1008000" y="12888000"/>
             <a:ext cx="19368000" cy="0"/>
           </a:xfrm>
           <a:prstGeom prst="line">
@@ -1964,13 +1856,13 @@
       </p:sp>
       <p:sp>
         <p:nvSpPr>
-          <p:cNvPr id="31" name="Shape 25"/>
+          <p:cNvPr id="27" name="Shape 21"/>
           <p:cNvSpPr/>
           <p:nvPr/>
         </p:nvSpPr>
         <p:spPr>
           <a:xfrm>
-            <a:off x="1008000" y="13302000"/>
+            <a:off x="1008000" y="12438000"/>
             <a:ext cx="900000" cy="900000"/>
           </a:xfrm>
           <a:prstGeom prst="ellipse">
@@ -1989,13 +1881,13 @@
       </p:sp>
       <p:sp>
         <p:nvSpPr>
-          <p:cNvPr id="32" name="Text 26"/>
+          <p:cNvPr id="28" name="Text 22"/>
           <p:cNvSpPr txBox="1"/>
           <p:nvPr/>
         </p:nvSpPr>
         <p:spPr>
           <a:xfrm>
-            <a:off x="1008000" y="13302000"/>
+            <a:off x="1008000" y="12438000"/>
             <a:ext cx="900000" cy="900000"/>
           </a:xfrm>
           <a:prstGeom prst="rect">
@@ -2028,14 +1920,14 @@
       </p:sp>
       <p:sp>
         <p:nvSpPr>
-          <p:cNvPr id="33" name="Sprint S1"/>
+          <p:cNvPr id="29" name="Sprint S1"/>
           <p:cNvSpPr txBox="1"/>
           <p:nvPr/>
         </p:nvSpPr>
         <p:spPr>
           <a:xfrm>
-            <a:off x="1008000" y="14292000"/>
-            <a:ext cx="3078000" cy="1188000"/>
+            <a:off x="1008000" y="13464000"/>
+            <a:ext cx="3078000" cy="396000"/>
           </a:xfrm>
           <a:prstGeom prst="rect">
             <a:avLst/>
@@ -2048,9 +1940,6 @@
           <a:lstStyle/>
           <a:p>
             <a:pPr indent="0" marL="0">
-              <a:lnSpc>
-                <a:spcPct val="100000"/>
-              </a:lnSpc>
               <a:buNone/>
             </a:pPr>
             <a:r>
@@ -2066,37 +1955,17 @@
             </a:r>
             <a:endParaRPr lang="en-US" sz="2600" dirty="0"/>
           </a:p>
-          <a:p>
-            <a:pPr indent="0" marL="0">
-              <a:lnSpc>
-                <a:spcPct val="100000"/>
-              </a:lnSpc>
-              <a:buNone/>
-            </a:pPr>
-            <a:r>
-              <a:rPr lang="en-US" sz="2200" dirty="0">
-                <a:solidFill>
-                  <a:srgbClr val="444444"/>
-                </a:solidFill>
-                <a:latin typeface="Arial" pitchFamily="34" charset="0"/>
-                <a:ea typeface="Arial" pitchFamily="34" charset="-122"/>
-                <a:cs typeface="Arial" pitchFamily="34" charset="-120"/>
-              </a:rPr>
-              <a:t>Database design, models, first API</a:t>
-            </a:r>
-            <a:endParaRPr lang="en-US" sz="2600" dirty="0"/>
-          </a:p>
-        </p:txBody>
-      </p:sp>
-      <p:sp>
-        <p:nvSpPr>
-          <p:cNvPr id="34" name="Shape 28"/>
+        </p:txBody>
+      </p:sp>
+      <p:sp>
+        <p:nvSpPr>
+          <p:cNvPr id="30" name="Shape 24"/>
           <p:cNvSpPr/>
           <p:nvPr/>
         </p:nvSpPr>
         <p:spPr>
           <a:xfrm>
-            <a:off x="4266000" y="13302000"/>
+            <a:off x="4266000" y="12438000"/>
             <a:ext cx="900000" cy="900000"/>
           </a:xfrm>
           <a:prstGeom prst="ellipse">
@@ -2115,13 +1984,13 @@
       </p:sp>
       <p:sp>
         <p:nvSpPr>
-          <p:cNvPr id="35" name="Text 29"/>
+          <p:cNvPr id="31" name="Text 25"/>
           <p:cNvSpPr txBox="1"/>
           <p:nvPr/>
         </p:nvSpPr>
         <p:spPr>
           <a:xfrm>
-            <a:off x="4266000" y="13302000"/>
+            <a:off x="4266000" y="12438000"/>
             <a:ext cx="900000" cy="900000"/>
           </a:xfrm>
           <a:prstGeom prst="rect">
@@ -2154,14 +2023,14 @@
       </p:sp>
       <p:sp>
         <p:nvSpPr>
-          <p:cNvPr id="36" name="Sprint S2"/>
+          <p:cNvPr id="32" name="Sprint S2"/>
           <p:cNvSpPr txBox="1"/>
           <p:nvPr/>
         </p:nvSpPr>
         <p:spPr>
           <a:xfrm>
-            <a:off x="4266000" y="14292000"/>
-            <a:ext cx="3078000" cy="1188000"/>
+            <a:off x="4266000" y="13464000"/>
+            <a:ext cx="3078000" cy="396000"/>
           </a:xfrm>
           <a:prstGeom prst="rect">
             <a:avLst/>
@@ -2174,9 +2043,6 @@
           <a:lstStyle/>
           <a:p>
             <a:pPr indent="0" marL="0">
-              <a:lnSpc>
-                <a:spcPct val="100000"/>
-              </a:lnSpc>
               <a:buNone/>
             </a:pPr>
             <a:r>
@@ -2192,37 +2058,17 @@
             </a:r>
             <a:endParaRPr lang="en-US" sz="2600" dirty="0"/>
           </a:p>
-          <a:p>
-            <a:pPr indent="0" marL="0">
-              <a:lnSpc>
-                <a:spcPct val="100000"/>
-              </a:lnSpc>
-              <a:buNone/>
-            </a:pPr>
-            <a:r>
-              <a:rPr lang="en-US" sz="2200" dirty="0">
-                <a:solidFill>
-                  <a:srgbClr val="444444"/>
-                </a:solidFill>
-                <a:latin typeface="Arial" pitchFamily="34" charset="0"/>
-                <a:ea typeface="Arial" pitchFamily="34" charset="-122"/>
-                <a:cs typeface="Arial" pitchFamily="34" charset="-120"/>
-              </a:rPr>
-              <a:t>SQL Server + item instances</a:t>
-            </a:r>
-            <a:endParaRPr lang="en-US" sz="2600" dirty="0"/>
-          </a:p>
-        </p:txBody>
-      </p:sp>
-      <p:sp>
-        <p:nvSpPr>
-          <p:cNvPr id="37" name="Shape 31"/>
+        </p:txBody>
+      </p:sp>
+      <p:sp>
+        <p:nvSpPr>
+          <p:cNvPr id="33" name="Shape 27"/>
           <p:cNvSpPr/>
           <p:nvPr/>
         </p:nvSpPr>
         <p:spPr>
           <a:xfrm>
-            <a:off x="7524000" y="13302000"/>
+            <a:off x="7524000" y="12438000"/>
             <a:ext cx="900000" cy="900000"/>
           </a:xfrm>
           <a:prstGeom prst="ellipse">
@@ -2241,13 +2087,13 @@
       </p:sp>
       <p:sp>
         <p:nvSpPr>
-          <p:cNvPr id="38" name="Text 32"/>
+          <p:cNvPr id="34" name="Text 28"/>
           <p:cNvSpPr txBox="1"/>
           <p:nvPr/>
         </p:nvSpPr>
         <p:spPr>
           <a:xfrm>
-            <a:off x="7524000" y="13302000"/>
+            <a:off x="7524000" y="12438000"/>
             <a:ext cx="900000" cy="900000"/>
           </a:xfrm>
           <a:prstGeom prst="rect">
@@ -2280,14 +2126,14 @@
       </p:sp>
       <p:sp>
         <p:nvSpPr>
-          <p:cNvPr id="39" name="Sprint S3"/>
+          <p:cNvPr id="35" name="Sprint S3"/>
           <p:cNvSpPr txBox="1"/>
           <p:nvPr/>
         </p:nvSpPr>
         <p:spPr>
           <a:xfrm>
-            <a:off x="7524000" y="14292000"/>
-            <a:ext cx="3078000" cy="1188000"/>
+            <a:off x="7524000" y="13464000"/>
+            <a:ext cx="3078000" cy="396000"/>
           </a:xfrm>
           <a:prstGeom prst="rect">
             <a:avLst/>
@@ -2300,9 +2146,6 @@
           <a:lstStyle/>
           <a:p>
             <a:pPr indent="0" marL="0">
-              <a:lnSpc>
-                <a:spcPct val="100000"/>
-              </a:lnSpc>
               <a:buNone/>
             </a:pPr>
             <a:r>
@@ -2318,37 +2161,17 @@
             </a:r>
             <a:endParaRPr lang="en-US" sz="2600" dirty="0"/>
           </a:p>
-          <a:p>
-            <a:pPr indent="0" marL="0">
-              <a:lnSpc>
-                <a:spcPct val="100000"/>
-              </a:lnSpc>
-              <a:buNone/>
-            </a:pPr>
-            <a:r>
-              <a:rPr lang="en-US" sz="2200" dirty="0">
-                <a:solidFill>
-                  <a:srgbClr val="444444"/>
-                </a:solidFill>
-                <a:latin typeface="Arial" pitchFamily="34" charset="0"/>
-                <a:ea typeface="Arial" pitchFamily="34" charset="-122"/>
-                <a:cs typeface="Arial" pitchFamily="34" charset="-120"/>
-              </a:rPr>
-              <a:t>Schools define their own fields</a:t>
-            </a:r>
-            <a:endParaRPr lang="en-US" sz="2600" dirty="0"/>
-          </a:p>
-        </p:txBody>
-      </p:sp>
-      <p:sp>
-        <p:nvSpPr>
-          <p:cNvPr id="40" name="Shape 34"/>
+        </p:txBody>
+      </p:sp>
+      <p:sp>
+        <p:nvSpPr>
+          <p:cNvPr id="36" name="Shape 30"/>
           <p:cNvSpPr/>
           <p:nvPr/>
         </p:nvSpPr>
         <p:spPr>
           <a:xfrm>
-            <a:off x="10782000" y="13302000"/>
+            <a:off x="10782000" y="12438000"/>
             <a:ext cx="900000" cy="900000"/>
           </a:xfrm>
           <a:prstGeom prst="ellipse">
@@ -2367,13 +2190,13 @@
       </p:sp>
       <p:sp>
         <p:nvSpPr>
-          <p:cNvPr id="41" name="Text 35"/>
+          <p:cNvPr id="37" name="Text 31"/>
           <p:cNvSpPr txBox="1"/>
           <p:nvPr/>
         </p:nvSpPr>
         <p:spPr>
           <a:xfrm>
-            <a:off x="10782000" y="13302000"/>
+            <a:off x="10782000" y="12438000"/>
             <a:ext cx="900000" cy="900000"/>
           </a:xfrm>
           <a:prstGeom prst="rect">
@@ -2406,14 +2229,14 @@
       </p:sp>
       <p:sp>
         <p:nvSpPr>
-          <p:cNvPr id="42" name="Sprint S4"/>
+          <p:cNvPr id="38" name="Sprint S4"/>
           <p:cNvSpPr txBox="1"/>
           <p:nvPr/>
         </p:nvSpPr>
         <p:spPr>
           <a:xfrm>
-            <a:off x="10782000" y="14292000"/>
-            <a:ext cx="3078000" cy="1188000"/>
+            <a:off x="10782000" y="13464000"/>
+            <a:ext cx="3078000" cy="396000"/>
           </a:xfrm>
           <a:prstGeom prst="rect">
             <a:avLst/>
@@ -2426,9 +2249,6 @@
           <a:lstStyle/>
           <a:p>
             <a:pPr indent="0" marL="0">
-              <a:lnSpc>
-                <a:spcPct val="100000"/>
-              </a:lnSpc>
               <a:buNone/>
             </a:pPr>
             <a:r>
@@ -2444,37 +2264,17 @@
             </a:r>
             <a:endParaRPr lang="en-US" sz="2600" dirty="0"/>
           </a:p>
-          <a:p>
-            <a:pPr indent="0" marL="0">
-              <a:lnSpc>
-                <a:spcPct val="100000"/>
-              </a:lnSpc>
-              <a:buNone/>
-            </a:pPr>
-            <a:r>
-              <a:rPr lang="en-US" sz="2200" dirty="0">
-                <a:solidFill>
-                  <a:srgbClr val="444444"/>
-                </a:solidFill>
-                <a:latin typeface="Arial" pitchFamily="34" charset="0"/>
-                <a:ea typeface="Arial" pitchFamily="34" charset="-122"/>
-                <a:cs typeface="Arial" pitchFamily="34" charset="-120"/>
-              </a:rPr>
-              <a:t>Borrow, return, live stock</a:t>
-            </a:r>
-            <a:endParaRPr lang="en-US" sz="2600" dirty="0"/>
-          </a:p>
-        </p:txBody>
-      </p:sp>
-      <p:sp>
-        <p:nvSpPr>
-          <p:cNvPr id="43" name="Shape 37"/>
+        </p:txBody>
+      </p:sp>
+      <p:sp>
+        <p:nvSpPr>
+          <p:cNvPr id="39" name="Shape 33"/>
           <p:cNvSpPr/>
           <p:nvPr/>
         </p:nvSpPr>
         <p:spPr>
           <a:xfrm>
-            <a:off x="14040000" y="13302000"/>
+            <a:off x="14040000" y="12438000"/>
             <a:ext cx="900000" cy="900000"/>
           </a:xfrm>
           <a:prstGeom prst="ellipse">
@@ -2493,13 +2293,13 @@
       </p:sp>
       <p:sp>
         <p:nvSpPr>
-          <p:cNvPr id="44" name="Text 38"/>
+          <p:cNvPr id="40" name="Text 34"/>
           <p:cNvSpPr txBox="1"/>
           <p:nvPr/>
         </p:nvSpPr>
         <p:spPr>
           <a:xfrm>
-            <a:off x="14040000" y="13302000"/>
+            <a:off x="14040000" y="12438000"/>
             <a:ext cx="900000" cy="900000"/>
           </a:xfrm>
           <a:prstGeom prst="rect">
@@ -2532,14 +2332,14 @@
       </p:sp>
       <p:sp>
         <p:nvSpPr>
-          <p:cNvPr id="45" name="Sprint S5"/>
+          <p:cNvPr id="41" name="Sprint S5"/>
           <p:cNvSpPr txBox="1"/>
           <p:nvPr/>
         </p:nvSpPr>
         <p:spPr>
           <a:xfrm>
-            <a:off x="14040000" y="14292000"/>
-            <a:ext cx="3078000" cy="1188000"/>
+            <a:off x="14040000" y="13464000"/>
+            <a:ext cx="3078000" cy="396000"/>
           </a:xfrm>
           <a:prstGeom prst="rect">
             <a:avLst/>
@@ -2552,9 +2352,6 @@
           <a:lstStyle/>
           <a:p>
             <a:pPr indent="0" marL="0">
-              <a:lnSpc>
-                <a:spcPct val="100000"/>
-              </a:lnSpc>
               <a:buNone/>
             </a:pPr>
             <a:r>
@@ -2570,37 +2367,17 @@
             </a:r>
             <a:endParaRPr lang="en-US" sz="2600" dirty="0"/>
           </a:p>
-          <a:p>
-            <a:pPr indent="0" marL="0">
-              <a:lnSpc>
-                <a:spcPct val="100000"/>
-              </a:lnSpc>
-              <a:buNone/>
-            </a:pPr>
-            <a:r>
-              <a:rPr lang="en-US" sz="2200" dirty="0">
-                <a:solidFill>
-                  <a:srgbClr val="444444"/>
-                </a:solidFill>
-                <a:latin typeface="Arial" pitchFamily="34" charset="0"/>
-                <a:ea typeface="Arial" pitchFamily="34" charset="-122"/>
-                <a:cs typeface="Arial" pitchFamily="34" charset="-120"/>
-              </a:rPr>
-              <a:t>Expiry alerts, search, comments</a:t>
-            </a:r>
-            <a:endParaRPr lang="en-US" sz="2600" dirty="0"/>
-          </a:p>
-        </p:txBody>
-      </p:sp>
-      <p:sp>
-        <p:nvSpPr>
-          <p:cNvPr id="46" name="Shape 40"/>
+        </p:txBody>
+      </p:sp>
+      <p:sp>
+        <p:nvSpPr>
+          <p:cNvPr id="42" name="Shape 36"/>
           <p:cNvSpPr/>
           <p:nvPr/>
         </p:nvSpPr>
         <p:spPr>
           <a:xfrm>
-            <a:off x="17298000" y="13302000"/>
+            <a:off x="17298000" y="12438000"/>
             <a:ext cx="900000" cy="900000"/>
           </a:xfrm>
           <a:prstGeom prst="ellipse">
@@ -2619,164 +2396,247 @@
       </p:sp>
       <p:sp>
         <p:nvSpPr>
+          <p:cNvPr id="43" name="Text 37"/>
+          <p:cNvSpPr txBox="1"/>
+          <p:nvPr/>
+        </p:nvSpPr>
+        <p:spPr>
+          <a:xfrm>
+            <a:off x="17298000" y="12438000"/>
+            <a:ext cx="900000" cy="900000"/>
+          </a:xfrm>
+          <a:prstGeom prst="rect">
+            <a:avLst/>
+          </a:prstGeom>
+          <a:noFill/>
+          <a:ln/>
+        </p:spPr>
+        <p:txBody>
+          <a:bodyPr wrap="square" lIns="0" tIns="0" rIns="0" bIns="0" rtlCol="0" anchor="ctr"/>
+          <a:lstStyle/>
+          <a:p>
+            <a:pPr algn="ctr" indent="0" marL="0">
+              <a:buNone/>
+            </a:pPr>
+            <a:r>
+              <a:rPr lang="en-US" sz="2400" b="1" dirty="0">
+                <a:solidFill>
+                  <a:srgbClr val="FFFFFF"/>
+                </a:solidFill>
+                <a:latin typeface="Arial" pitchFamily="34" charset="0"/>
+                <a:ea typeface="Arial" pitchFamily="34" charset="-122"/>
+                <a:cs typeface="Arial" pitchFamily="34" charset="-120"/>
+              </a:rPr>
+              <a:t>S6</a:t>
+            </a:r>
+            <a:endParaRPr lang="en-US" sz="2400" dirty="0"/>
+          </a:p>
+        </p:txBody>
+      </p:sp>
+      <p:sp>
+        <p:nvSpPr>
+          <p:cNvPr id="44" name="Sprint S6"/>
+          <p:cNvSpPr txBox="1"/>
+          <p:nvPr/>
+        </p:nvSpPr>
+        <p:spPr>
+          <a:xfrm>
+            <a:off x="17298000" y="13464000"/>
+            <a:ext cx="3078000" cy="396000"/>
+          </a:xfrm>
+          <a:prstGeom prst="rect">
+            <a:avLst/>
+          </a:prstGeom>
+          <a:noFill/>
+          <a:ln/>
+        </p:spPr>
+        <p:txBody>
+          <a:bodyPr wrap="square" lIns="0" tIns="0" rIns="0" bIns="0" rtlCol="0" anchor="t"/>
+          <a:lstStyle/>
+          <a:p>
+            <a:pPr indent="0" marL="0">
+              <a:buNone/>
+            </a:pPr>
+            <a:r>
+              <a:rPr lang="en-US" sz="2600" b="1" dirty="0">
+                <a:solidFill>
+                  <a:srgbClr val="262626"/>
+                </a:solidFill>
+                <a:latin typeface="Arial" pitchFamily="34" charset="0"/>
+                <a:ea typeface="Arial" pitchFamily="34" charset="-122"/>
+                <a:cs typeface="Arial" pitchFamily="34" charset="-120"/>
+              </a:rPr>
+              <a:t>Testing &amp; Docker</a:t>
+            </a:r>
+            <a:endParaRPr lang="en-US" sz="2600" dirty="0"/>
+          </a:p>
+        </p:txBody>
+      </p:sp>
+      <p:sp>
+        <p:nvSpPr>
+          <p:cNvPr id="45" name="How we worked"/>
+          <p:cNvSpPr txBox="1"/>
+          <p:nvPr/>
+        </p:nvSpPr>
+        <p:spPr>
+          <a:xfrm>
+            <a:off x="1008000" y="14112000"/>
+            <a:ext cx="19368000" cy="432000"/>
+          </a:xfrm>
+          <a:prstGeom prst="rect">
+            <a:avLst/>
+          </a:prstGeom>
+          <a:noFill/>
+          <a:ln/>
+        </p:spPr>
+        <p:txBody>
+          <a:bodyPr wrap="square" lIns="0" tIns="0" rIns="0" bIns="0" rtlCol="0" anchor="t"/>
+          <a:lstStyle/>
+          <a:p>
+            <a:pPr indent="0" marL="0">
+              <a:buNone/>
+            </a:pPr>
+            <a:r>
+              <a:rPr lang="en-US" sz="2600" b="1" dirty="0">
+                <a:solidFill>
+                  <a:srgbClr val="444444"/>
+                </a:solidFill>
+                <a:latin typeface="Arial" pitchFamily="34" charset="0"/>
+                <a:ea typeface="Arial" pitchFamily="34" charset="-122"/>
+                <a:cs typeface="Arial" pitchFamily="34" charset="-120"/>
+              </a:rPr>
+              <a:t>Agile Scrum</a:t>
+            </a:r>
+            <a:pPr indent="0" marL="0">
+              <a:buNone/>
+            </a:pPr>
+            <a:r>
+              <a:rPr lang="en-US" sz="2600" dirty="0">
+                <a:solidFill>
+                  <a:srgbClr val="444444"/>
+                </a:solidFill>
+                <a:latin typeface="Arial" pitchFamily="34" charset="0"/>
+                <a:ea typeface="Arial" pitchFamily="34" charset="-122"/>
+                <a:cs typeface="Arial" pitchFamily="34" charset="-120"/>
+              </a:rPr>
+              <a:t> in six sprints, reviewed with our client every sprint.</a:t>
+            </a:r>
+            <a:endParaRPr lang="en-US" sz="2600" dirty="0"/>
+          </a:p>
+        </p:txBody>
+      </p:sp>
+      <p:sp>
+        <p:nvSpPr>
+          <p:cNvPr id="46" name="THE SOLUTION heading"/>
+          <p:cNvSpPr txBox="1"/>
+          <p:nvPr/>
+        </p:nvSpPr>
+        <p:spPr>
+          <a:xfrm>
+            <a:off x="1008000" y="15336000"/>
+            <a:ext cx="13680000" cy="864000"/>
+          </a:xfrm>
+          <a:prstGeom prst="rect">
+            <a:avLst/>
+          </a:prstGeom>
+          <a:noFill/>
+          <a:ln/>
+        </p:spPr>
+        <p:txBody>
+          <a:bodyPr wrap="square" lIns="0" tIns="0" rIns="0" bIns="0" rtlCol="0" anchor="b"/>
+          <a:lstStyle/>
+          <a:p>
+            <a:pPr indent="0" marL="0">
+              <a:buNone/>
+            </a:pPr>
+            <a:r>
+              <a:rPr lang="en-US" sz="6400" b="1" dirty="0">
+                <a:solidFill>
+                  <a:srgbClr val="009CA6"/>
+                </a:solidFill>
+                <a:latin typeface="Arial" pitchFamily="34" charset="0"/>
+                <a:ea typeface="Arial" pitchFamily="34" charset="-122"/>
+                <a:cs typeface="Arial" pitchFamily="34" charset="-120"/>
+              </a:rPr>
+              <a:t>03  </a:t>
+            </a:r>
+            <a:pPr indent="0" marL="0">
+              <a:buNone/>
+            </a:pPr>
+            <a:r>
+              <a:rPr lang="en-US" sz="5200" b="1" spc="100" kern="0" dirty="0">
+                <a:solidFill>
+                  <a:srgbClr val="009CA6"/>
+                </a:solidFill>
+                <a:latin typeface="Arial" pitchFamily="34" charset="0"/>
+                <a:ea typeface="Arial" pitchFamily="34" charset="-122"/>
+                <a:cs typeface="Arial" pitchFamily="34" charset="-120"/>
+              </a:rPr>
+              <a:t>THE SOLUTION</a:t>
+            </a:r>
+            <a:endParaRPr lang="en-US" sz="6400" dirty="0"/>
+          </a:p>
+        </p:txBody>
+      </p:sp>
+      <p:sp>
+        <p:nvSpPr>
           <p:cNvPr id="47" name="Text 41"/>
           <p:cNvSpPr txBox="1"/>
           <p:nvPr/>
         </p:nvSpPr>
         <p:spPr>
           <a:xfrm>
-            <a:off x="17298000" y="13302000"/>
-            <a:ext cx="900000" cy="900000"/>
-          </a:xfrm>
-          <a:prstGeom prst="rect">
-            <a:avLst/>
-          </a:prstGeom>
-          <a:noFill/>
-          <a:ln/>
-        </p:spPr>
-        <p:txBody>
-          <a:bodyPr wrap="square" lIns="0" tIns="0" rIns="0" bIns="0" rtlCol="0" anchor="ctr"/>
-          <a:lstStyle/>
-          <a:p>
-            <a:pPr algn="ctr" indent="0" marL="0">
-              <a:buNone/>
-            </a:pPr>
-            <a:r>
-              <a:rPr lang="en-US" sz="2400" b="1" dirty="0">
-                <a:solidFill>
-                  <a:srgbClr val="FFFFFF"/>
-                </a:solidFill>
-                <a:latin typeface="Arial" pitchFamily="34" charset="0"/>
-                <a:ea typeface="Arial" pitchFamily="34" charset="-122"/>
-                <a:cs typeface="Arial" pitchFamily="34" charset="-120"/>
-              </a:rPr>
-              <a:t>S6</a:t>
-            </a:r>
-            <a:endParaRPr lang="en-US" sz="2400" dirty="0"/>
-          </a:p>
-        </p:txBody>
-      </p:sp>
-      <p:sp>
-        <p:nvSpPr>
-          <p:cNvPr id="48" name="Sprint S6"/>
-          <p:cNvSpPr txBox="1"/>
-          <p:nvPr/>
-        </p:nvSpPr>
-        <p:spPr>
-          <a:xfrm>
-            <a:off x="17298000" y="14292000"/>
-            <a:ext cx="3078000" cy="1188000"/>
-          </a:xfrm>
-          <a:prstGeom prst="rect">
-            <a:avLst/>
-          </a:prstGeom>
-          <a:noFill/>
-          <a:ln/>
-        </p:spPr>
-        <p:txBody>
-          <a:bodyPr wrap="square" lIns="0" tIns="0" rIns="0" bIns="0" rtlCol="0" anchor="t"/>
-          <a:lstStyle/>
-          <a:p>
-            <a:pPr indent="0" marL="0">
-              <a:lnSpc>
-                <a:spcPct val="100000"/>
-              </a:lnSpc>
-              <a:buNone/>
-            </a:pPr>
-            <a:r>
-              <a:rPr lang="en-US" sz="2600" b="1" dirty="0">
-                <a:solidFill>
-                  <a:srgbClr val="262626"/>
-                </a:solidFill>
-                <a:latin typeface="Arial" pitchFamily="34" charset="0"/>
-                <a:ea typeface="Arial" pitchFamily="34" charset="-122"/>
-                <a:cs typeface="Arial" pitchFamily="34" charset="-120"/>
-              </a:rPr>
-              <a:t>Hardening</a:t>
-            </a:r>
-            <a:endParaRPr lang="en-US" sz="2600" dirty="0"/>
-          </a:p>
-          <a:p>
-            <a:pPr indent="0" marL="0">
-              <a:lnSpc>
-                <a:spcPct val="100000"/>
-              </a:lnSpc>
-              <a:buNone/>
-            </a:pPr>
-            <a:r>
-              <a:rPr lang="en-US" sz="2200" dirty="0">
-                <a:solidFill>
-                  <a:srgbClr val="444444"/>
-                </a:solidFill>
-                <a:latin typeface="Arial" pitchFamily="34" charset="0"/>
-                <a:ea typeface="Arial" pitchFamily="34" charset="-122"/>
-                <a:cs typeface="Arial" pitchFamily="34" charset="-120"/>
-              </a:rPr>
-              <a:t>Error handling, tests, Docker</a:t>
-            </a:r>
-            <a:endParaRPr lang="en-US" sz="2600" dirty="0"/>
-          </a:p>
-        </p:txBody>
-      </p:sp>
-      <p:sp>
-        <p:nvSpPr>
-          <p:cNvPr id="49" name="Text 43"/>
-          <p:cNvSpPr txBox="1"/>
-          <p:nvPr/>
-        </p:nvSpPr>
-        <p:spPr>
-          <a:xfrm>
-            <a:off x="1008000" y="15624000"/>
-            <a:ext cx="2592000" cy="396000"/>
-          </a:xfrm>
-          <a:prstGeom prst="rect">
-            <a:avLst/>
-          </a:prstGeom>
-          <a:noFill/>
-          <a:ln/>
-        </p:spPr>
-        <p:txBody>
-          <a:bodyPr wrap="square" lIns="0" tIns="0" rIns="0" bIns="0" rtlCol="0" anchor="ctr"/>
-          <a:lstStyle/>
-          <a:p>
-            <a:pPr indent="0" marL="0">
-              <a:buNone/>
-            </a:pPr>
-            <a:r>
-              <a:rPr lang="en-US" sz="2400" b="1" dirty="0">
-                <a:solidFill>
-                  <a:srgbClr val="262626"/>
-                </a:solidFill>
-                <a:latin typeface="Arial" pitchFamily="34" charset="0"/>
-                <a:ea typeface="Arial" pitchFamily="34" charset="-122"/>
-                <a:cs typeface="Arial" pitchFamily="34" charset="-120"/>
-              </a:rPr>
-              <a:t>How we worked:</a:t>
-            </a:r>
-            <a:endParaRPr lang="en-US" sz="2400" dirty="0"/>
-          </a:p>
-        </p:txBody>
-      </p:sp>
-      <p:sp>
-        <p:nvSpPr>
-          <p:cNvPr id="50" name="Shape 44"/>
+            <a:off x="13680000" y="15336000"/>
+            <a:ext cx="6696000" cy="864000"/>
+          </a:xfrm>
+          <a:prstGeom prst="rect">
+            <a:avLst/>
+          </a:prstGeom>
+          <a:noFill/>
+          <a:ln/>
+        </p:spPr>
+        <p:txBody>
+          <a:bodyPr wrap="square" lIns="0" tIns="0" rIns="0" bIns="0" rtlCol="0" anchor="b"/>
+          <a:lstStyle/>
+          <a:p>
+            <a:pPr algn="r" indent="0" marL="0">
+              <a:buNone/>
+            </a:pPr>
+            <a:r>
+              <a:rPr lang="en-US" sz="2800" i="1" dirty="0">
+                <a:solidFill>
+                  <a:srgbClr val="666666"/>
+                </a:solidFill>
+                <a:latin typeface="Arial" pitchFamily="34" charset="0"/>
+                <a:ea typeface="Arial" pitchFamily="34" charset="-122"/>
+                <a:cs typeface="Arial" pitchFamily="34" charset="-120"/>
+              </a:rPr>
+              <a:t>What did we develop?</a:t>
+            </a:r>
+            <a:endParaRPr lang="en-US" sz="2800" dirty="0"/>
+          </a:p>
+        </p:txBody>
+      </p:sp>
+      <p:sp>
+        <p:nvSpPr>
+          <p:cNvPr id="48" name="Shape 42"/>
           <p:cNvSpPr/>
           <p:nvPr/>
         </p:nvSpPr>
         <p:spPr>
           <a:xfrm>
-            <a:off x="3600000" y="15588000"/>
-            <a:ext cx="2055600" cy="468000"/>
+            <a:off x="1008000" y="16488000"/>
+            <a:ext cx="4707000" cy="1188000"/>
           </a:xfrm>
           <a:prstGeom prst="roundRect">
             <a:avLst>
-              <a:gd name="adj" fmla="val 50000"/>
+              <a:gd name="adj" fmla="val 9091"/>
             </a:avLst>
           </a:prstGeom>
           <a:solidFill>
-            <a:srgbClr val="F2F4F5"/>
-          </a:solidFill>
-          <a:ln w="12700">
+            <a:srgbClr val="FFFFFF"/>
+          </a:solidFill>
+          <a:ln w="19050">
             <a:solidFill>
               <a:srgbClr val="DDDDDD"/>
             </a:solidFill>
@@ -2786,63 +2646,113 @@
       </p:sp>
       <p:sp>
         <p:nvSpPr>
-          <p:cNvPr id="51" name="Text 45"/>
+          <p:cNvPr id="49" name="Shape 43"/>
+          <p:cNvSpPr/>
+          <p:nvPr/>
+        </p:nvSpPr>
+        <p:spPr>
+          <a:xfrm>
+            <a:off x="1008000" y="16488000"/>
+            <a:ext cx="4707000" cy="90000"/>
+          </a:xfrm>
+          <a:prstGeom prst="rect">
+            <a:avLst>
+              <a:gd name="adj" fmla="val 120000"/>
+            </a:avLst>
+          </a:prstGeom>
+          <a:solidFill>
+            <a:srgbClr val="009CA6"/>
+          </a:solidFill>
+          <a:ln w="12700">
+            <a:solidFill>
+              <a:srgbClr val="009CA6"/>
+            </a:solidFill>
+            <a:prstDash val="solid"/>
+          </a:ln>
+        </p:spPr>
+      </p:sp>
+      <p:sp>
+        <p:nvSpPr>
+          <p:cNvPr id="50" name="Feature: Track every item"/>
           <p:cNvSpPr txBox="1"/>
           <p:nvPr/>
         </p:nvSpPr>
         <p:spPr>
           <a:xfrm>
-            <a:off x="3600000" y="15588000"/>
-            <a:ext cx="2055600" cy="468000"/>
-          </a:xfrm>
-          <a:prstGeom prst="rect">
-            <a:avLst/>
-          </a:prstGeom>
-          <a:noFill/>
-          <a:ln/>
-        </p:spPr>
-        <p:txBody>
-          <a:bodyPr wrap="square" lIns="0" tIns="0" rIns="0" bIns="0" rtlCol="0" anchor="ctr"/>
-          <a:lstStyle/>
-          <a:p>
-            <a:pPr algn="ctr" indent="0" marL="0">
+            <a:off x="1188000" y="16704000"/>
+            <a:ext cx="4383000" cy="900000"/>
+          </a:xfrm>
+          <a:prstGeom prst="rect">
+            <a:avLst/>
+          </a:prstGeom>
+          <a:noFill/>
+          <a:ln/>
+        </p:spPr>
+        <p:txBody>
+          <a:bodyPr wrap="square" lIns="0" tIns="0" rIns="0" bIns="0" rtlCol="0" anchor="t"/>
+          <a:lstStyle/>
+          <a:p>
+            <a:pPr indent="0" marL="0">
+              <a:lnSpc>
+                <a:spcPct val="100000"/>
+              </a:lnSpc>
+              <a:buNone/>
+            </a:pPr>
+            <a:r>
+              <a:rPr lang="en-US" sz="2600" b="1" dirty="0">
+                <a:solidFill>
+                  <a:srgbClr val="262626"/>
+                </a:solidFill>
+                <a:latin typeface="Arial" pitchFamily="34" charset="0"/>
+                <a:ea typeface="Arial" pitchFamily="34" charset="-122"/>
+                <a:cs typeface="Arial" pitchFamily="34" charset="-120"/>
+              </a:rPr>
+              <a:t>Track every item</a:t>
+            </a:r>
+            <a:endParaRPr lang="en-US" sz="2600" dirty="0"/>
+          </a:p>
+          <a:p>
+            <a:pPr indent="0" marL="0">
+              <a:lnSpc>
+                <a:spcPct val="100000"/>
+              </a:lnSpc>
               <a:buNone/>
             </a:pPr>
             <a:r>
               <a:rPr lang="en-US" sz="2200" dirty="0">
                 <a:solidFill>
-                  <a:srgbClr val="262626"/>
-                </a:solidFill>
-                <a:latin typeface="Arial" pitchFamily="34" charset="0"/>
-                <a:ea typeface="Arial" pitchFamily="34" charset="-122"/>
-                <a:cs typeface="Arial" pitchFamily="34" charset="-120"/>
-              </a:rPr>
-              <a:t>Agile Scrum</a:t>
-            </a:r>
-            <a:endParaRPr lang="en-US" sz="2200" dirty="0"/>
-          </a:p>
-        </p:txBody>
-      </p:sp>
-      <p:sp>
-        <p:nvSpPr>
-          <p:cNvPr id="52" name="Shape 46"/>
+                  <a:srgbClr val="444444"/>
+                </a:solidFill>
+                <a:latin typeface="Arial" pitchFamily="34" charset="0"/>
+                <a:ea typeface="Arial" pitchFamily="34" charset="-122"/>
+                <a:cs typeface="Arial" pitchFamily="34" charset="-120"/>
+              </a:rPr>
+              <a:t>Each laptop or kit, one by one</a:t>
+            </a:r>
+            <a:endParaRPr lang="en-US" sz="2600" dirty="0"/>
+          </a:p>
+        </p:txBody>
+      </p:sp>
+      <p:sp>
+        <p:nvSpPr>
+          <p:cNvPr id="51" name="Shape 45"/>
           <p:cNvSpPr/>
           <p:nvPr/>
         </p:nvSpPr>
         <p:spPr>
           <a:xfrm>
-            <a:off x="5799600" y="15588000"/>
-            <a:ext cx="1022400" cy="468000"/>
+            <a:off x="5859000" y="16488000"/>
+            <a:ext cx="4707000" cy="1188000"/>
           </a:xfrm>
           <a:prstGeom prst="roundRect">
             <a:avLst>
-              <a:gd name="adj" fmla="val 50000"/>
+              <a:gd name="adj" fmla="val 9091"/>
             </a:avLst>
           </a:prstGeom>
           <a:solidFill>
-            <a:srgbClr val="F2F4F5"/>
-          </a:solidFill>
-          <a:ln w="12700">
+            <a:srgbClr val="FFFFFF"/>
+          </a:solidFill>
+          <a:ln w="19050">
             <a:solidFill>
               <a:srgbClr val="DDDDDD"/>
             </a:solidFill>
@@ -2852,40 +2762,90 @@
       </p:sp>
       <p:sp>
         <p:nvSpPr>
-          <p:cNvPr id="53" name="Text 47"/>
+          <p:cNvPr id="52" name="Shape 46"/>
+          <p:cNvSpPr/>
+          <p:nvPr/>
+        </p:nvSpPr>
+        <p:spPr>
+          <a:xfrm>
+            <a:off x="5859000" y="16488000"/>
+            <a:ext cx="4707000" cy="90000"/>
+          </a:xfrm>
+          <a:prstGeom prst="rect">
+            <a:avLst>
+              <a:gd name="adj" fmla="val 120000"/>
+            </a:avLst>
+          </a:prstGeom>
+          <a:solidFill>
+            <a:srgbClr val="009CA6"/>
+          </a:solidFill>
+          <a:ln w="12700">
+            <a:solidFill>
+              <a:srgbClr val="009CA6"/>
+            </a:solidFill>
+            <a:prstDash val="solid"/>
+          </a:ln>
+        </p:spPr>
+      </p:sp>
+      <p:sp>
+        <p:nvSpPr>
+          <p:cNvPr id="53" name="Feature: Loans &amp; returns"/>
           <p:cNvSpPr txBox="1"/>
           <p:nvPr/>
         </p:nvSpPr>
         <p:spPr>
           <a:xfrm>
-            <a:off x="5799600" y="15588000"/>
-            <a:ext cx="1022400" cy="468000"/>
-          </a:xfrm>
-          <a:prstGeom prst="rect">
-            <a:avLst/>
-          </a:prstGeom>
-          <a:noFill/>
-          <a:ln/>
-        </p:spPr>
-        <p:txBody>
-          <a:bodyPr wrap="square" lIns="0" tIns="0" rIns="0" bIns="0" rtlCol="0" anchor="ctr"/>
-          <a:lstStyle/>
-          <a:p>
-            <a:pPr algn="ctr" indent="0" marL="0">
+            <a:off x="6039000" y="16704000"/>
+            <a:ext cx="4383000" cy="900000"/>
+          </a:xfrm>
+          <a:prstGeom prst="rect">
+            <a:avLst/>
+          </a:prstGeom>
+          <a:noFill/>
+          <a:ln/>
+        </p:spPr>
+        <p:txBody>
+          <a:bodyPr wrap="square" lIns="0" tIns="0" rIns="0" bIns="0" rtlCol="0" anchor="t"/>
+          <a:lstStyle/>
+          <a:p>
+            <a:pPr indent="0" marL="0">
+              <a:lnSpc>
+                <a:spcPct val="100000"/>
+              </a:lnSpc>
+              <a:buNone/>
+            </a:pPr>
+            <a:r>
+              <a:rPr lang="en-US" sz="2600" b="1" dirty="0">
+                <a:solidFill>
+                  <a:srgbClr val="262626"/>
+                </a:solidFill>
+                <a:latin typeface="Arial" pitchFamily="34" charset="0"/>
+                <a:ea typeface="Arial" pitchFamily="34" charset="-122"/>
+                <a:cs typeface="Arial" pitchFamily="34" charset="-120"/>
+              </a:rPr>
+              <a:t>Loans &amp; returns</a:t>
+            </a:r>
+            <a:endParaRPr lang="en-US" sz="2600" dirty="0"/>
+          </a:p>
+          <a:p>
+            <a:pPr indent="0" marL="0">
+              <a:lnSpc>
+                <a:spcPct val="100000"/>
+              </a:lnSpc>
               <a:buNone/>
             </a:pPr>
             <a:r>
               <a:rPr lang="en-US" sz="2200" dirty="0">
                 <a:solidFill>
-                  <a:srgbClr val="262626"/>
-                </a:solidFill>
-                <a:latin typeface="Arial" pitchFamily="34" charset="0"/>
-                <a:ea typeface="Arial" pitchFamily="34" charset="-122"/>
-                <a:cs typeface="Arial" pitchFamily="34" charset="-120"/>
-              </a:rPr>
-              <a:t>Jira</a:t>
-            </a:r>
-            <a:endParaRPr lang="en-US" sz="2200" dirty="0"/>
+                  <a:srgbClr val="444444"/>
+                </a:solidFill>
+                <a:latin typeface="Arial" pitchFamily="34" charset="0"/>
+                <a:ea typeface="Arial" pitchFamily="34" charset="-122"/>
+                <a:cs typeface="Arial" pitchFamily="34" charset="-120"/>
+              </a:rPr>
+              <a:t>Stock updates automatically</a:t>
+            </a:r>
+            <a:endParaRPr lang="en-US" sz="2600" dirty="0"/>
           </a:p>
         </p:txBody>
       </p:sp>
@@ -2897,18 +2857,18 @@
         </p:nvSpPr>
         <p:spPr>
           <a:xfrm>
-            <a:off x="6966000" y="15588000"/>
-            <a:ext cx="3384000" cy="468000"/>
+            <a:off x="1008000" y="17820000"/>
+            <a:ext cx="4707000" cy="1188000"/>
           </a:xfrm>
           <a:prstGeom prst="roundRect">
             <a:avLst>
-              <a:gd name="adj" fmla="val 50000"/>
+              <a:gd name="adj" fmla="val 9091"/>
             </a:avLst>
           </a:prstGeom>
           <a:solidFill>
-            <a:srgbClr val="F2F4F5"/>
-          </a:solidFill>
-          <a:ln w="12700">
+            <a:srgbClr val="FFFFFF"/>
+          </a:solidFill>
+          <a:ln w="19050">
             <a:solidFill>
               <a:srgbClr val="DDDDDD"/>
             </a:solidFill>
@@ -2918,63 +2878,113 @@
       </p:sp>
       <p:sp>
         <p:nvSpPr>
-          <p:cNvPr id="55" name="Text 49"/>
+          <p:cNvPr id="55" name="Shape 49"/>
+          <p:cNvSpPr/>
+          <p:nvPr/>
+        </p:nvSpPr>
+        <p:spPr>
+          <a:xfrm>
+            <a:off x="1008000" y="17820000"/>
+            <a:ext cx="4707000" cy="90000"/>
+          </a:xfrm>
+          <a:prstGeom prst="rect">
+            <a:avLst>
+              <a:gd name="adj" fmla="val 120000"/>
+            </a:avLst>
+          </a:prstGeom>
+          <a:solidFill>
+            <a:srgbClr val="009CA6"/>
+          </a:solidFill>
+          <a:ln w="12700">
+            <a:solidFill>
+              <a:srgbClr val="009CA6"/>
+            </a:solidFill>
+            <a:prstDash val="solid"/>
+          </a:ln>
+        </p:spPr>
+      </p:sp>
+      <p:sp>
+        <p:nvSpPr>
+          <p:cNvPr id="56" name="Feature: Custom fields"/>
           <p:cNvSpPr txBox="1"/>
           <p:nvPr/>
         </p:nvSpPr>
         <p:spPr>
           <a:xfrm>
-            <a:off x="6966000" y="15588000"/>
-            <a:ext cx="3384000" cy="468000"/>
-          </a:xfrm>
-          <a:prstGeom prst="rect">
-            <a:avLst/>
-          </a:prstGeom>
-          <a:noFill/>
-          <a:ln/>
-        </p:spPr>
-        <p:txBody>
-          <a:bodyPr wrap="square" lIns="0" tIns="0" rIns="0" bIns="0" rtlCol="0" anchor="ctr"/>
-          <a:lstStyle/>
-          <a:p>
-            <a:pPr algn="ctr" indent="0" marL="0">
+            <a:off x="1188000" y="18036000"/>
+            <a:ext cx="4383000" cy="900000"/>
+          </a:xfrm>
+          <a:prstGeom prst="rect">
+            <a:avLst/>
+          </a:prstGeom>
+          <a:noFill/>
+          <a:ln/>
+        </p:spPr>
+        <p:txBody>
+          <a:bodyPr wrap="square" lIns="0" tIns="0" rIns="0" bIns="0" rtlCol="0" anchor="t"/>
+          <a:lstStyle/>
+          <a:p>
+            <a:pPr indent="0" marL="0">
+              <a:lnSpc>
+                <a:spcPct val="100000"/>
+              </a:lnSpc>
+              <a:buNone/>
+            </a:pPr>
+            <a:r>
+              <a:rPr lang="en-US" sz="2600" b="1" dirty="0">
+                <a:solidFill>
+                  <a:srgbClr val="262626"/>
+                </a:solidFill>
+                <a:latin typeface="Arial" pitchFamily="34" charset="0"/>
+                <a:ea typeface="Arial" pitchFamily="34" charset="-122"/>
+                <a:cs typeface="Arial" pitchFamily="34" charset="-120"/>
+              </a:rPr>
+              <a:t>Custom fields</a:t>
+            </a:r>
+            <a:endParaRPr lang="en-US" sz="2600" dirty="0"/>
+          </a:p>
+          <a:p>
+            <a:pPr indent="0" marL="0">
+              <a:lnSpc>
+                <a:spcPct val="100000"/>
+              </a:lnSpc>
               <a:buNone/>
             </a:pPr>
             <a:r>
               <a:rPr lang="en-US" sz="2200" dirty="0">
                 <a:solidFill>
-                  <a:srgbClr val="262626"/>
-                </a:solidFill>
-                <a:latin typeface="Arial" pitchFamily="34" charset="0"/>
-                <a:ea typeface="Arial" pitchFamily="34" charset="-122"/>
-                <a:cs typeface="Arial" pitchFamily="34" charset="-120"/>
-              </a:rPr>
-              <a:t>GitHub pull requests</a:t>
-            </a:r>
-            <a:endParaRPr lang="en-US" sz="2200" dirty="0"/>
-          </a:p>
-        </p:txBody>
-      </p:sp>
-      <p:sp>
-        <p:nvSpPr>
-          <p:cNvPr id="56" name="Shape 50"/>
+                  <a:srgbClr val="444444"/>
+                </a:solidFill>
+                <a:latin typeface="Arial" pitchFamily="34" charset="0"/>
+                <a:ea typeface="Arial" pitchFamily="34" charset="-122"/>
+                <a:cs typeface="Arial" pitchFamily="34" charset="-120"/>
+              </a:rPr>
+              <a:t>Each school adds its own</a:t>
+            </a:r>
+            <a:endParaRPr lang="en-US" sz="2600" dirty="0"/>
+          </a:p>
+        </p:txBody>
+      </p:sp>
+      <p:sp>
+        <p:nvSpPr>
+          <p:cNvPr id="57" name="Shape 51"/>
           <p:cNvSpPr/>
           <p:nvPr/>
         </p:nvSpPr>
         <p:spPr>
           <a:xfrm>
-            <a:off x="10494000" y="15588000"/>
-            <a:ext cx="3531600" cy="468000"/>
+            <a:off x="5859000" y="17820000"/>
+            <a:ext cx="4707000" cy="1188000"/>
           </a:xfrm>
           <a:prstGeom prst="roundRect">
             <a:avLst>
-              <a:gd name="adj" fmla="val 50000"/>
+              <a:gd name="adj" fmla="val 9091"/>
             </a:avLst>
           </a:prstGeom>
           <a:solidFill>
-            <a:srgbClr val="F2F4F5"/>
-          </a:solidFill>
-          <a:ln w="12700">
+            <a:srgbClr val="FFFFFF"/>
+          </a:solidFill>
+          <a:ln w="19050">
             <a:solidFill>
               <a:srgbClr val="DDDDDD"/>
             </a:solidFill>
@@ -2984,65 +2994,26 @@
       </p:sp>
       <p:sp>
         <p:nvSpPr>
-          <p:cNvPr id="57" name="Text 51"/>
-          <p:cNvSpPr txBox="1"/>
-          <p:nvPr/>
-        </p:nvSpPr>
-        <p:spPr>
-          <a:xfrm>
-            <a:off x="10494000" y="15588000"/>
-            <a:ext cx="3531600" cy="468000"/>
-          </a:xfrm>
-          <a:prstGeom prst="rect">
-            <a:avLst/>
-          </a:prstGeom>
-          <a:noFill/>
-          <a:ln/>
-        </p:spPr>
-        <p:txBody>
-          <a:bodyPr wrap="square" lIns="0" tIns="0" rIns="0" bIns="0" rtlCol="0" anchor="ctr"/>
-          <a:lstStyle/>
-          <a:p>
-            <a:pPr algn="ctr" indent="0" marL="0">
-              <a:buNone/>
-            </a:pPr>
-            <a:r>
-              <a:rPr lang="en-US" sz="2200" dirty="0">
-                <a:solidFill>
-                  <a:srgbClr val="262626"/>
-                </a:solidFill>
-                <a:latin typeface="Arial" pitchFamily="34" charset="0"/>
-                <a:ea typeface="Arial" pitchFamily="34" charset="-122"/>
-                <a:cs typeface="Arial" pitchFamily="34" charset="-120"/>
-              </a:rPr>
-              <a:t>Client sprint reviews</a:t>
-            </a:r>
-            <a:endParaRPr lang="en-US" sz="2200" dirty="0"/>
-          </a:p>
-        </p:txBody>
-      </p:sp>
-      <p:sp>
-        <p:nvSpPr>
           <p:cNvPr id="58" name="Shape 52"/>
           <p:cNvSpPr/>
           <p:nvPr/>
         </p:nvSpPr>
         <p:spPr>
           <a:xfrm>
-            <a:off x="14169600" y="15588000"/>
-            <a:ext cx="2203200" cy="468000"/>
-          </a:xfrm>
-          <a:prstGeom prst="roundRect">
+            <a:off x="5859000" y="17820000"/>
+            <a:ext cx="4707000" cy="90000"/>
+          </a:xfrm>
+          <a:prstGeom prst="rect">
             <a:avLst>
-              <a:gd name="adj" fmla="val 50000"/>
+              <a:gd name="adj" fmla="val 120000"/>
             </a:avLst>
           </a:prstGeom>
           <a:solidFill>
-            <a:srgbClr val="F2F4F5"/>
+            <a:srgbClr val="009CA6"/>
           </a:solidFill>
           <a:ln w="12700">
             <a:solidFill>
-              <a:srgbClr val="DDDDDD"/>
+              <a:srgbClr val="009CA6"/>
             </a:solidFill>
             <a:prstDash val="solid"/>
           </a:ln>
@@ -3050,149 +3021,80 @@
       </p:sp>
       <p:sp>
         <p:nvSpPr>
-          <p:cNvPr id="59" name="Text 53"/>
+          <p:cNvPr id="59" name="Feature: Expiry alerts"/>
           <p:cNvSpPr txBox="1"/>
           <p:nvPr/>
         </p:nvSpPr>
         <p:spPr>
           <a:xfrm>
-            <a:off x="14169600" y="15588000"/>
-            <a:ext cx="2203200" cy="468000"/>
-          </a:xfrm>
-          <a:prstGeom prst="rect">
-            <a:avLst/>
-          </a:prstGeom>
-          <a:noFill/>
-          <a:ln/>
-        </p:spPr>
-        <p:txBody>
-          <a:bodyPr wrap="square" lIns="0" tIns="0" rIns="0" bIns="0" rtlCol="0" anchor="ctr"/>
-          <a:lstStyle/>
-          <a:p>
-            <a:pPr algn="ctr" indent="0" marL="0">
+            <a:off x="6039000" y="18036000"/>
+            <a:ext cx="4383000" cy="900000"/>
+          </a:xfrm>
+          <a:prstGeom prst="rect">
+            <a:avLst/>
+          </a:prstGeom>
+          <a:noFill/>
+          <a:ln/>
+        </p:spPr>
+        <p:txBody>
+          <a:bodyPr wrap="square" lIns="0" tIns="0" rIns="0" bIns="0" rtlCol="0" anchor="t"/>
+          <a:lstStyle/>
+          <a:p>
+            <a:pPr indent="0" marL="0">
+              <a:lnSpc>
+                <a:spcPct val="100000"/>
+              </a:lnSpc>
+              <a:buNone/>
+            </a:pPr>
+            <a:r>
+              <a:rPr lang="en-US" sz="2600" b="1" dirty="0">
+                <a:solidFill>
+                  <a:srgbClr val="262626"/>
+                </a:solidFill>
+                <a:latin typeface="Arial" pitchFamily="34" charset="0"/>
+                <a:ea typeface="Arial" pitchFamily="34" charset="-122"/>
+                <a:cs typeface="Arial" pitchFamily="34" charset="-120"/>
+              </a:rPr>
+              <a:t>Expiry alerts</a:t>
+            </a:r>
+            <a:endParaRPr lang="en-US" sz="2600" dirty="0"/>
+          </a:p>
+          <a:p>
+            <a:pPr indent="0" marL="0">
+              <a:lnSpc>
+                <a:spcPct val="100000"/>
+              </a:lnSpc>
               <a:buNone/>
             </a:pPr>
             <a:r>
               <a:rPr lang="en-US" sz="2200" dirty="0">
                 <a:solidFill>
-                  <a:srgbClr val="262626"/>
-                </a:solidFill>
-                <a:latin typeface="Arial" pitchFamily="34" charset="0"/>
-                <a:ea typeface="Arial" pitchFamily="34" charset="-122"/>
-                <a:cs typeface="Arial" pitchFamily="34" charset="-120"/>
-              </a:rPr>
-              <a:t>Unit testing</a:t>
-            </a:r>
-            <a:endParaRPr lang="en-US" sz="2200" dirty="0"/>
-          </a:p>
-        </p:txBody>
-      </p:sp>
-      <p:sp>
-        <p:nvSpPr>
-          <p:cNvPr id="60" name="THE SOLUTION heading"/>
-          <p:cNvSpPr txBox="1"/>
-          <p:nvPr/>
-        </p:nvSpPr>
-        <p:spPr>
-          <a:xfrm>
-            <a:off x="1008000" y="16380000"/>
-            <a:ext cx="13680000" cy="864000"/>
-          </a:xfrm>
-          <a:prstGeom prst="rect">
-            <a:avLst/>
-          </a:prstGeom>
-          <a:noFill/>
-          <a:ln/>
-        </p:spPr>
-        <p:txBody>
-          <a:bodyPr wrap="square" lIns="0" tIns="0" rIns="0" bIns="0" rtlCol="0" anchor="b"/>
-          <a:lstStyle/>
-          <a:p>
-            <a:pPr indent="0" marL="0">
-              <a:buNone/>
-            </a:pPr>
-            <a:r>
-              <a:rPr lang="en-US" sz="6400" b="1" dirty="0">
-                <a:solidFill>
-                  <a:srgbClr val="009CA6"/>
-                </a:solidFill>
-                <a:latin typeface="Arial" pitchFamily="34" charset="0"/>
-                <a:ea typeface="Arial" pitchFamily="34" charset="-122"/>
-                <a:cs typeface="Arial" pitchFamily="34" charset="-120"/>
-              </a:rPr>
-              <a:t>03  </a:t>
-            </a:r>
-            <a:pPr indent="0" marL="0">
-              <a:buNone/>
-            </a:pPr>
-            <a:r>
-              <a:rPr lang="en-US" sz="5200" b="1" spc="100" kern="0" dirty="0">
-                <a:solidFill>
-                  <a:srgbClr val="009CA6"/>
-                </a:solidFill>
-                <a:latin typeface="Arial" pitchFamily="34" charset="0"/>
-                <a:ea typeface="Arial" pitchFamily="34" charset="-122"/>
-                <a:cs typeface="Arial" pitchFamily="34" charset="-120"/>
-              </a:rPr>
-              <a:t>THE SOLUTION</a:t>
-            </a:r>
-            <a:endParaRPr lang="en-US" sz="6400" dirty="0"/>
-          </a:p>
-        </p:txBody>
-      </p:sp>
-      <p:sp>
-        <p:nvSpPr>
-          <p:cNvPr id="61" name="Text 55"/>
-          <p:cNvSpPr txBox="1"/>
-          <p:nvPr/>
-        </p:nvSpPr>
-        <p:spPr>
-          <a:xfrm>
-            <a:off x="13680000" y="16380000"/>
-            <a:ext cx="6696000" cy="864000"/>
-          </a:xfrm>
-          <a:prstGeom prst="rect">
-            <a:avLst/>
-          </a:prstGeom>
-          <a:noFill/>
-          <a:ln/>
-        </p:spPr>
-        <p:txBody>
-          <a:bodyPr wrap="square" lIns="0" tIns="0" rIns="0" bIns="0" rtlCol="0" anchor="b"/>
-          <a:lstStyle/>
-          <a:p>
-            <a:pPr algn="r" indent="0" marL="0">
-              <a:buNone/>
-            </a:pPr>
-            <a:r>
-              <a:rPr lang="en-US" sz="2800" i="1" dirty="0">
-                <a:solidFill>
-                  <a:srgbClr val="666666"/>
-                </a:solidFill>
-                <a:latin typeface="Arial" pitchFamily="34" charset="0"/>
-                <a:ea typeface="Arial" pitchFamily="34" charset="-122"/>
-                <a:cs typeface="Arial" pitchFamily="34" charset="-120"/>
-              </a:rPr>
-              <a:t>What did we develop?</a:t>
-            </a:r>
-            <a:endParaRPr lang="en-US" sz="2800" dirty="0"/>
-          </a:p>
-        </p:txBody>
-      </p:sp>
-      <p:sp>
-        <p:nvSpPr>
-          <p:cNvPr id="62" name="Shape 56"/>
+                  <a:srgbClr val="444444"/>
+                </a:solidFill>
+                <a:latin typeface="Arial" pitchFamily="34" charset="0"/>
+                <a:ea typeface="Arial" pitchFamily="34" charset="-122"/>
+                <a:cs typeface="Arial" pitchFamily="34" charset="-120"/>
+              </a:rPr>
+              <a:t>Catch out-of-date stock</a:t>
+            </a:r>
+            <a:endParaRPr lang="en-US" sz="2600" dirty="0"/>
+          </a:p>
+        </p:txBody>
+      </p:sp>
+      <p:sp>
+        <p:nvSpPr>
+          <p:cNvPr id="60" name="Shape 54"/>
           <p:cNvSpPr/>
           <p:nvPr/>
         </p:nvSpPr>
         <p:spPr>
           <a:xfrm>
-            <a:off x="1008000" y="17352000"/>
-            <a:ext cx="4707000" cy="1368000"/>
+            <a:off x="1008000" y="19188000"/>
+            <a:ext cx="4707000" cy="1188000"/>
           </a:xfrm>
           <a:prstGeom prst="roundRect">
             <a:avLst>
-              <a:gd name="adj" fmla="val 10526"/>
+              <a:gd name="adj" fmla="val 12121"/>
             </a:avLst>
           </a:prstGeom>
           <a:solidFill>
@@ -3208,14 +3110,14 @@
       </p:sp>
       <p:sp>
         <p:nvSpPr>
-          <p:cNvPr id="63" name="Stat 40"/>
+          <p:cNvPr id="61" name="Stat 40"/>
           <p:cNvSpPr txBox="1"/>
           <p:nvPr/>
         </p:nvSpPr>
         <p:spPr>
           <a:xfrm>
-            <a:off x="1224000" y="17352000"/>
-            <a:ext cx="4347000" cy="1368000"/>
+            <a:off x="1224000" y="19188000"/>
+            <a:ext cx="4347000" cy="1188000"/>
           </a:xfrm>
           <a:prstGeom prst="rect">
             <a:avLst/>
@@ -3231,7 +3133,7 @@
               <a:buNone/>
             </a:pPr>
             <a:r>
-              <a:rPr lang="en-US" sz="6400" b="1" dirty="0">
+              <a:rPr lang="en-US" sz="6000" b="1" dirty="0">
                 <a:solidFill>
                   <a:srgbClr val="3FD3DC"/>
                 </a:solidFill>
@@ -3255,24 +3157,24 @@
               </a:rPr>
               <a:t>API endpoints</a:t>
             </a:r>
-            <a:endParaRPr lang="en-US" sz="6400" dirty="0"/>
-          </a:p>
-        </p:txBody>
-      </p:sp>
-      <p:sp>
-        <p:nvSpPr>
-          <p:cNvPr id="64" name="Shape 58"/>
+            <a:endParaRPr lang="en-US" sz="6000" dirty="0"/>
+          </a:p>
+        </p:txBody>
+      </p:sp>
+      <p:sp>
+        <p:nvSpPr>
+          <p:cNvPr id="62" name="Shape 56"/>
           <p:cNvSpPr/>
           <p:nvPr/>
         </p:nvSpPr>
         <p:spPr>
           <a:xfrm>
-            <a:off x="5895000" y="17352000"/>
-            <a:ext cx="4707000" cy="1368000"/>
+            <a:off x="5859000" y="19188000"/>
+            <a:ext cx="4707000" cy="1188000"/>
           </a:xfrm>
           <a:prstGeom prst="roundRect">
             <a:avLst>
-              <a:gd name="adj" fmla="val 10526"/>
+              <a:gd name="adj" fmla="val 12121"/>
             </a:avLst>
           </a:prstGeom>
           <a:solidFill>
@@ -3288,14 +3190,14 @@
       </p:sp>
       <p:sp>
         <p:nvSpPr>
-          <p:cNvPr id="65" name="Stat 105"/>
+          <p:cNvPr id="63" name="Stat 105"/>
           <p:cNvSpPr txBox="1"/>
           <p:nvPr/>
         </p:nvSpPr>
         <p:spPr>
           <a:xfrm>
-            <a:off x="6111000" y="17352000"/>
-            <a:ext cx="4347000" cy="1368000"/>
+            <a:off x="6075000" y="19188000"/>
+            <a:ext cx="4347000" cy="1188000"/>
           </a:xfrm>
           <a:prstGeom prst="rect">
             <a:avLst/>
@@ -3311,7 +3213,7 @@
               <a:buNone/>
             </a:pPr>
             <a:r>
-              <a:rPr lang="en-US" sz="6400" b="1" dirty="0">
+              <a:rPr lang="en-US" sz="6000" b="1" dirty="0">
                 <a:solidFill>
                   <a:srgbClr val="B49BF0"/>
                 </a:solidFill>
@@ -3335,1321 +3237,24 @@
               </a:rPr>
               <a:t>passing tests</a:t>
             </a:r>
-            <a:endParaRPr lang="en-US" sz="6400" dirty="0"/>
-          </a:p>
-        </p:txBody>
-      </p:sp>
-      <p:sp>
-        <p:nvSpPr>
-          <p:cNvPr id="66" name="Shape 60"/>
+            <a:endParaRPr lang="en-US" sz="6000" dirty="0"/>
+          </a:p>
+        </p:txBody>
+      </p:sp>
+      <p:sp>
+        <p:nvSpPr>
+          <p:cNvPr id="64" name="Shape 58"/>
           <p:cNvSpPr/>
           <p:nvPr/>
         </p:nvSpPr>
         <p:spPr>
           <a:xfrm>
-            <a:off x="10782000" y="17352000"/>
-            <a:ext cx="4707000" cy="1368000"/>
+            <a:off x="10818000" y="16488000"/>
+            <a:ext cx="9558000" cy="3681593"/>
           </a:xfrm>
           <a:prstGeom prst="roundRect">
             <a:avLst>
-              <a:gd name="adj" fmla="val 10526"/>
-            </a:avLst>
-          </a:prstGeom>
-          <a:solidFill>
-            <a:srgbClr val="262626"/>
-          </a:solidFill>
-          <a:ln w="12700">
-            <a:solidFill>
-              <a:srgbClr val="262626"/>
-            </a:solidFill>
-            <a:prstDash val="solid"/>
-          </a:ln>
-        </p:spPr>
-      </p:sp>
-      <p:sp>
-        <p:nvSpPr>
-          <p:cNvPr id="67" name="Stat 13"/>
-          <p:cNvSpPr txBox="1"/>
-          <p:nvPr/>
-        </p:nvSpPr>
-        <p:spPr>
-          <a:xfrm>
-            <a:off x="10998000" y="17352000"/>
-            <a:ext cx="4347000" cy="1368000"/>
-          </a:xfrm>
-          <a:prstGeom prst="rect">
-            <a:avLst/>
-          </a:prstGeom>
-          <a:noFill/>
-          <a:ln/>
-        </p:spPr>
-        <p:txBody>
-          <a:bodyPr wrap="square" lIns="0" tIns="0" rIns="0" bIns="0" rtlCol="0" anchor="ctr"/>
-          <a:lstStyle/>
-          <a:p>
-            <a:pPr indent="0" marL="0">
-              <a:buNone/>
-            </a:pPr>
-            <a:r>
-              <a:rPr lang="en-US" sz="6400" b="1" dirty="0">
-                <a:solidFill>
-                  <a:srgbClr val="F06FC2"/>
-                </a:solidFill>
-                <a:latin typeface="Arial" pitchFamily="34" charset="0"/>
-                <a:ea typeface="Arial" pitchFamily="34" charset="-122"/>
-                <a:cs typeface="Arial" pitchFamily="34" charset="-120"/>
-              </a:rPr>
-              <a:t>13  </a:t>
-            </a:r>
-            <a:pPr indent="0" marL="0">
-              <a:buNone/>
-            </a:pPr>
-            <a:r>
-              <a:rPr lang="en-US" sz="2300" dirty="0">
-                <a:solidFill>
-                  <a:srgbClr val="DDDDDD"/>
-                </a:solidFill>
-                <a:latin typeface="Arial" pitchFamily="34" charset="0"/>
-                <a:ea typeface="Arial" pitchFamily="34" charset="-122"/>
-                <a:cs typeface="Arial" pitchFamily="34" charset="-120"/>
-              </a:rPr>
-              <a:t>data models</a:t>
-            </a:r>
-            <a:endParaRPr lang="en-US" sz="6400" dirty="0"/>
-          </a:p>
-        </p:txBody>
-      </p:sp>
-      <p:sp>
-        <p:nvSpPr>
-          <p:cNvPr id="68" name="Shape 62"/>
-          <p:cNvSpPr/>
-          <p:nvPr/>
-        </p:nvSpPr>
-        <p:spPr>
-          <a:xfrm>
-            <a:off x="15669000" y="17352000"/>
-            <a:ext cx="4707000" cy="1368000"/>
-          </a:xfrm>
-          <a:prstGeom prst="roundRect">
-            <a:avLst>
-              <a:gd name="adj" fmla="val 10526"/>
-            </a:avLst>
-          </a:prstGeom>
-          <a:solidFill>
-            <a:srgbClr val="262626"/>
-          </a:solidFill>
-          <a:ln w="12700">
-            <a:solidFill>
-              <a:srgbClr val="262626"/>
-            </a:solidFill>
-            <a:prstDash val="solid"/>
-          </a:ln>
-        </p:spPr>
-      </p:sp>
-      <p:sp>
-        <p:nvSpPr>
-          <p:cNvPr id="69" name="Stat 6"/>
-          <p:cNvSpPr txBox="1"/>
-          <p:nvPr/>
-        </p:nvSpPr>
-        <p:spPr>
-          <a:xfrm>
-            <a:off x="15885000" y="17352000"/>
-            <a:ext cx="4347000" cy="1368000"/>
-          </a:xfrm>
-          <a:prstGeom prst="rect">
-            <a:avLst/>
-          </a:prstGeom>
-          <a:noFill/>
-          <a:ln/>
-        </p:spPr>
-        <p:txBody>
-          <a:bodyPr wrap="square" lIns="0" tIns="0" rIns="0" bIns="0" rtlCol="0" anchor="ctr"/>
-          <a:lstStyle/>
-          <a:p>
-            <a:pPr indent="0" marL="0">
-              <a:buNone/>
-            </a:pPr>
-            <a:r>
-              <a:rPr lang="en-US" sz="6400" b="1" dirty="0">
-                <a:solidFill>
-                  <a:srgbClr val="FF8A3D"/>
-                </a:solidFill>
-                <a:latin typeface="Arial" pitchFamily="34" charset="0"/>
-                <a:ea typeface="Arial" pitchFamily="34" charset="-122"/>
-                <a:cs typeface="Arial" pitchFamily="34" charset="-120"/>
-              </a:rPr>
-              <a:t>6  </a:t>
-            </a:r>
-            <a:pPr indent="0" marL="0">
-              <a:buNone/>
-            </a:pPr>
-            <a:r>
-              <a:rPr lang="en-US" sz="2300" dirty="0">
-                <a:solidFill>
-                  <a:srgbClr val="DDDDDD"/>
-                </a:solidFill>
-                <a:latin typeface="Arial" pitchFamily="34" charset="0"/>
-                <a:ea typeface="Arial" pitchFamily="34" charset="-122"/>
-                <a:cs typeface="Arial" pitchFamily="34" charset="-120"/>
-              </a:rPr>
-              <a:t>sprints delivered</a:t>
-            </a:r>
-            <a:endParaRPr lang="en-US" sz="6400" dirty="0"/>
-          </a:p>
-        </p:txBody>
-      </p:sp>
-      <p:sp>
-        <p:nvSpPr>
-          <p:cNvPr id="70" name="Shape 64"/>
-          <p:cNvSpPr/>
-          <p:nvPr/>
-        </p:nvSpPr>
-        <p:spPr>
-          <a:xfrm>
-            <a:off x="1008000" y="18936000"/>
-            <a:ext cx="4707000" cy="1080000"/>
-          </a:xfrm>
-          <a:prstGeom prst="roundRect">
-            <a:avLst>
-              <a:gd name="adj" fmla="val 10000"/>
-            </a:avLst>
-          </a:prstGeom>
-          <a:solidFill>
-            <a:srgbClr val="FFFFFF"/>
-          </a:solidFill>
-          <a:ln w="19050">
-            <a:solidFill>
-              <a:srgbClr val="DDDDDD"/>
-            </a:solidFill>
-            <a:prstDash val="solid"/>
-          </a:ln>
-        </p:spPr>
-      </p:sp>
-      <p:sp>
-        <p:nvSpPr>
-          <p:cNvPr id="71" name="Shape 65"/>
-          <p:cNvSpPr/>
-          <p:nvPr/>
-        </p:nvSpPr>
-        <p:spPr>
-          <a:xfrm>
-            <a:off x="1008000" y="18936000"/>
-            <a:ext cx="4707000" cy="90000"/>
-          </a:xfrm>
-          <a:prstGeom prst="rect">
-            <a:avLst>
-              <a:gd name="adj" fmla="val 120000"/>
-            </a:avLst>
-          </a:prstGeom>
-          <a:solidFill>
-            <a:srgbClr val="009CA6"/>
-          </a:solidFill>
-          <a:ln w="12700">
-            <a:solidFill>
-              <a:srgbClr val="009CA6"/>
-            </a:solidFill>
-            <a:prstDash val="solid"/>
-          </a:ln>
-        </p:spPr>
-      </p:sp>
-      <p:sp>
-        <p:nvSpPr>
-          <p:cNvPr id="72" name="Feature: Unit tracking"/>
-          <p:cNvSpPr txBox="1"/>
-          <p:nvPr/>
-        </p:nvSpPr>
-        <p:spPr>
-          <a:xfrm>
-            <a:off x="1188000" y="19116000"/>
-            <a:ext cx="4383000" cy="828000"/>
-          </a:xfrm>
-          <a:prstGeom prst="rect">
-            <a:avLst/>
-          </a:prstGeom>
-          <a:noFill/>
-          <a:ln/>
-        </p:spPr>
-        <p:txBody>
-          <a:bodyPr wrap="square" lIns="0" tIns="0" rIns="0" bIns="0" rtlCol="0" anchor="t"/>
-          <a:lstStyle/>
-          <a:p>
-            <a:pPr indent="0" marL="0">
-              <a:lnSpc>
-                <a:spcPct val="100000"/>
-              </a:lnSpc>
-              <a:buNone/>
-            </a:pPr>
-            <a:r>
-              <a:rPr lang="en-US" sz="2600" b="1" dirty="0">
-                <a:solidFill>
-                  <a:srgbClr val="262626"/>
-                </a:solidFill>
-                <a:latin typeface="Arial" pitchFamily="34" charset="0"/>
-                <a:ea typeface="Arial" pitchFamily="34" charset="-122"/>
-                <a:cs typeface="Arial" pitchFamily="34" charset="-120"/>
-              </a:rPr>
-              <a:t>Unit tracking</a:t>
-            </a:r>
-            <a:endParaRPr lang="en-US" sz="2600" dirty="0"/>
-          </a:p>
-          <a:p>
-            <a:pPr indent="0" marL="0">
-              <a:lnSpc>
-                <a:spcPct val="100000"/>
-              </a:lnSpc>
-              <a:buNone/>
-            </a:pPr>
-            <a:r>
-              <a:rPr lang="en-US" sz="2200" dirty="0">
-                <a:solidFill>
-                  <a:srgbClr val="444444"/>
-                </a:solidFill>
-                <a:latin typeface="Arial" pitchFamily="34" charset="0"/>
-                <a:ea typeface="Arial" pitchFamily="34" charset="-122"/>
-                <a:cs typeface="Arial" pitchFamily="34" charset="-120"/>
-              </a:rPr>
-              <a:t>Every physical item, one by one</a:t>
-            </a:r>
-            <a:endParaRPr lang="en-US" sz="2600" dirty="0"/>
-          </a:p>
-        </p:txBody>
-      </p:sp>
-      <p:sp>
-        <p:nvSpPr>
-          <p:cNvPr id="73" name="Shape 67"/>
-          <p:cNvSpPr/>
-          <p:nvPr/>
-        </p:nvSpPr>
-        <p:spPr>
-          <a:xfrm>
-            <a:off x="5859000" y="18936000"/>
-            <a:ext cx="4707000" cy="1080000"/>
-          </a:xfrm>
-          <a:prstGeom prst="roundRect">
-            <a:avLst>
-              <a:gd name="adj" fmla="val 10000"/>
-            </a:avLst>
-          </a:prstGeom>
-          <a:solidFill>
-            <a:srgbClr val="FFFFFF"/>
-          </a:solidFill>
-          <a:ln w="19050">
-            <a:solidFill>
-              <a:srgbClr val="DDDDDD"/>
-            </a:solidFill>
-            <a:prstDash val="solid"/>
-          </a:ln>
-        </p:spPr>
-      </p:sp>
-      <p:sp>
-        <p:nvSpPr>
-          <p:cNvPr id="74" name="Shape 68"/>
-          <p:cNvSpPr/>
-          <p:nvPr/>
-        </p:nvSpPr>
-        <p:spPr>
-          <a:xfrm>
-            <a:off x="5859000" y="18936000"/>
-            <a:ext cx="4707000" cy="90000"/>
-          </a:xfrm>
-          <a:prstGeom prst="rect">
-            <a:avLst>
-              <a:gd name="adj" fmla="val 120000"/>
-            </a:avLst>
-          </a:prstGeom>
-          <a:solidFill>
-            <a:srgbClr val="009CA6"/>
-          </a:solidFill>
-          <a:ln w="12700">
-            <a:solidFill>
-              <a:srgbClr val="009CA6"/>
-            </a:solidFill>
-            <a:prstDash val="solid"/>
-          </a:ln>
-        </p:spPr>
-      </p:sp>
-      <p:sp>
-        <p:nvSpPr>
-          <p:cNvPr id="75" name="Feature: Loans &amp; returns"/>
-          <p:cNvSpPr txBox="1"/>
-          <p:nvPr/>
-        </p:nvSpPr>
-        <p:spPr>
-          <a:xfrm>
-            <a:off x="6039000" y="19116000"/>
-            <a:ext cx="4383000" cy="828000"/>
-          </a:xfrm>
-          <a:prstGeom prst="rect">
-            <a:avLst/>
-          </a:prstGeom>
-          <a:noFill/>
-          <a:ln/>
-        </p:spPr>
-        <p:txBody>
-          <a:bodyPr wrap="square" lIns="0" tIns="0" rIns="0" bIns="0" rtlCol="0" anchor="t"/>
-          <a:lstStyle/>
-          <a:p>
-            <a:pPr indent="0" marL="0">
-              <a:lnSpc>
-                <a:spcPct val="100000"/>
-              </a:lnSpc>
-              <a:buNone/>
-            </a:pPr>
-            <a:r>
-              <a:rPr lang="en-US" sz="2600" b="1" dirty="0">
-                <a:solidFill>
-                  <a:srgbClr val="262626"/>
-                </a:solidFill>
-                <a:latin typeface="Arial" pitchFamily="34" charset="0"/>
-                <a:ea typeface="Arial" pitchFamily="34" charset="-122"/>
-                <a:cs typeface="Arial" pitchFamily="34" charset="-120"/>
-              </a:rPr>
-              <a:t>Loans &amp; returns</a:t>
-            </a:r>
-            <a:endParaRPr lang="en-US" sz="2600" dirty="0"/>
-          </a:p>
-          <a:p>
-            <a:pPr indent="0" marL="0">
-              <a:lnSpc>
-                <a:spcPct val="100000"/>
-              </a:lnSpc>
-              <a:buNone/>
-            </a:pPr>
-            <a:r>
-              <a:rPr lang="en-US" sz="2200" dirty="0">
-                <a:solidFill>
-                  <a:srgbClr val="444444"/>
-                </a:solidFill>
-                <a:latin typeface="Arial" pitchFamily="34" charset="0"/>
-                <a:ea typeface="Arial" pitchFamily="34" charset="-122"/>
-                <a:cs typeface="Arial" pitchFamily="34" charset="-120"/>
-              </a:rPr>
-              <a:t>Stock updates automatically</a:t>
-            </a:r>
-            <a:endParaRPr lang="en-US" sz="2600" dirty="0"/>
-          </a:p>
-        </p:txBody>
-      </p:sp>
-      <p:sp>
-        <p:nvSpPr>
-          <p:cNvPr id="76" name="Shape 70"/>
-          <p:cNvSpPr/>
-          <p:nvPr/>
-        </p:nvSpPr>
-        <p:spPr>
-          <a:xfrm>
-            <a:off x="1008000" y="20160000"/>
-            <a:ext cx="4707000" cy="1080000"/>
-          </a:xfrm>
-          <a:prstGeom prst="roundRect">
-            <a:avLst>
-              <a:gd name="adj" fmla="val 10000"/>
-            </a:avLst>
-          </a:prstGeom>
-          <a:solidFill>
-            <a:srgbClr val="FFFFFF"/>
-          </a:solidFill>
-          <a:ln w="19050">
-            <a:solidFill>
-              <a:srgbClr val="DDDDDD"/>
-            </a:solidFill>
-            <a:prstDash val="solid"/>
-          </a:ln>
-        </p:spPr>
-      </p:sp>
-      <p:sp>
-        <p:nvSpPr>
-          <p:cNvPr id="77" name="Shape 71"/>
-          <p:cNvSpPr/>
-          <p:nvPr/>
-        </p:nvSpPr>
-        <p:spPr>
-          <a:xfrm>
-            <a:off x="1008000" y="20160000"/>
-            <a:ext cx="4707000" cy="90000"/>
-          </a:xfrm>
-          <a:prstGeom prst="rect">
-            <a:avLst>
-              <a:gd name="adj" fmla="val 120000"/>
-            </a:avLst>
-          </a:prstGeom>
-          <a:solidFill>
-            <a:srgbClr val="009CA6"/>
-          </a:solidFill>
-          <a:ln w="12700">
-            <a:solidFill>
-              <a:srgbClr val="009CA6"/>
-            </a:solidFill>
-            <a:prstDash val="solid"/>
-          </a:ln>
-        </p:spPr>
-      </p:sp>
-      <p:sp>
-        <p:nvSpPr>
-          <p:cNvPr id="78" name="Feature: Custom fields"/>
-          <p:cNvSpPr txBox="1"/>
-          <p:nvPr/>
-        </p:nvSpPr>
-        <p:spPr>
-          <a:xfrm>
-            <a:off x="1188000" y="20340000"/>
-            <a:ext cx="4383000" cy="828000"/>
-          </a:xfrm>
-          <a:prstGeom prst="rect">
-            <a:avLst/>
-          </a:prstGeom>
-          <a:noFill/>
-          <a:ln/>
-        </p:spPr>
-        <p:txBody>
-          <a:bodyPr wrap="square" lIns="0" tIns="0" rIns="0" bIns="0" rtlCol="0" anchor="t"/>
-          <a:lstStyle/>
-          <a:p>
-            <a:pPr indent="0" marL="0">
-              <a:lnSpc>
-                <a:spcPct val="100000"/>
-              </a:lnSpc>
-              <a:buNone/>
-            </a:pPr>
-            <a:r>
-              <a:rPr lang="en-US" sz="2600" b="1" dirty="0">
-                <a:solidFill>
-                  <a:srgbClr val="262626"/>
-                </a:solidFill>
-                <a:latin typeface="Arial" pitchFamily="34" charset="0"/>
-                <a:ea typeface="Arial" pitchFamily="34" charset="-122"/>
-                <a:cs typeface="Arial" pitchFamily="34" charset="-120"/>
-              </a:rPr>
-              <a:t>Custom fields</a:t>
-            </a:r>
-            <a:endParaRPr lang="en-US" sz="2600" dirty="0"/>
-          </a:p>
-          <a:p>
-            <a:pPr indent="0" marL="0">
-              <a:lnSpc>
-                <a:spcPct val="100000"/>
-              </a:lnSpc>
-              <a:buNone/>
-            </a:pPr>
-            <a:r>
-              <a:rPr lang="en-US" sz="2200" dirty="0">
-                <a:solidFill>
-                  <a:srgbClr val="444444"/>
-                </a:solidFill>
-                <a:latin typeface="Arial" pitchFamily="34" charset="0"/>
-                <a:ea typeface="Arial" pitchFamily="34" charset="-122"/>
-                <a:cs typeface="Arial" pitchFamily="34" charset="-120"/>
-              </a:rPr>
-              <a:t>Each school adds its own</a:t>
-            </a:r>
-            <a:endParaRPr lang="en-US" sz="2600" dirty="0"/>
-          </a:p>
-        </p:txBody>
-      </p:sp>
-      <p:sp>
-        <p:nvSpPr>
-          <p:cNvPr id="79" name="Shape 73"/>
-          <p:cNvSpPr/>
-          <p:nvPr/>
-        </p:nvSpPr>
-        <p:spPr>
-          <a:xfrm>
-            <a:off x="5859000" y="20160000"/>
-            <a:ext cx="4707000" cy="1080000"/>
-          </a:xfrm>
-          <a:prstGeom prst="roundRect">
-            <a:avLst>
-              <a:gd name="adj" fmla="val 10000"/>
-            </a:avLst>
-          </a:prstGeom>
-          <a:solidFill>
-            <a:srgbClr val="FFFFFF"/>
-          </a:solidFill>
-          <a:ln w="19050">
-            <a:solidFill>
-              <a:srgbClr val="DDDDDD"/>
-            </a:solidFill>
-            <a:prstDash val="solid"/>
-          </a:ln>
-        </p:spPr>
-      </p:sp>
-      <p:sp>
-        <p:nvSpPr>
-          <p:cNvPr id="80" name="Shape 74"/>
-          <p:cNvSpPr/>
-          <p:nvPr/>
-        </p:nvSpPr>
-        <p:spPr>
-          <a:xfrm>
-            <a:off x="5859000" y="20160000"/>
-            <a:ext cx="4707000" cy="90000"/>
-          </a:xfrm>
-          <a:prstGeom prst="rect">
-            <a:avLst>
-              <a:gd name="adj" fmla="val 120000"/>
-            </a:avLst>
-          </a:prstGeom>
-          <a:solidFill>
-            <a:srgbClr val="009CA6"/>
-          </a:solidFill>
-          <a:ln w="12700">
-            <a:solidFill>
-              <a:srgbClr val="009CA6"/>
-            </a:solidFill>
-            <a:prstDash val="solid"/>
-          </a:ln>
-        </p:spPr>
-      </p:sp>
-      <p:sp>
-        <p:nvSpPr>
-          <p:cNvPr id="81" name="Feature: Tags &amp; categories"/>
-          <p:cNvSpPr txBox="1"/>
-          <p:nvPr/>
-        </p:nvSpPr>
-        <p:spPr>
-          <a:xfrm>
-            <a:off x="6039000" y="20340000"/>
-            <a:ext cx="4383000" cy="828000"/>
-          </a:xfrm>
-          <a:prstGeom prst="rect">
-            <a:avLst/>
-          </a:prstGeom>
-          <a:noFill/>
-          <a:ln/>
-        </p:spPr>
-        <p:txBody>
-          <a:bodyPr wrap="square" lIns="0" tIns="0" rIns="0" bIns="0" rtlCol="0" anchor="t"/>
-          <a:lstStyle/>
-          <a:p>
-            <a:pPr indent="0" marL="0">
-              <a:lnSpc>
-                <a:spcPct val="100000"/>
-              </a:lnSpc>
-              <a:buNone/>
-            </a:pPr>
-            <a:r>
-              <a:rPr lang="en-US" sz="2600" b="1" dirty="0">
-                <a:solidFill>
-                  <a:srgbClr val="262626"/>
-                </a:solidFill>
-                <a:latin typeface="Arial" pitchFamily="34" charset="0"/>
-                <a:ea typeface="Arial" pitchFamily="34" charset="-122"/>
-                <a:cs typeface="Arial" pitchFamily="34" charset="-120"/>
-              </a:rPr>
-              <a:t>Tags &amp; categories</a:t>
-            </a:r>
-            <a:endParaRPr lang="en-US" sz="2600" dirty="0"/>
-          </a:p>
-          <a:p>
-            <a:pPr indent="0" marL="0">
-              <a:lnSpc>
-                <a:spcPct val="100000"/>
-              </a:lnSpc>
-              <a:buNone/>
-            </a:pPr>
-            <a:r>
-              <a:rPr lang="en-US" sz="2200" dirty="0">
-                <a:solidFill>
-                  <a:srgbClr val="444444"/>
-                </a:solidFill>
-                <a:latin typeface="Arial" pitchFamily="34" charset="0"/>
-                <a:ea typeface="Arial" pitchFamily="34" charset="-122"/>
-                <a:cs typeface="Arial" pitchFamily="34" charset="-120"/>
-              </a:rPr>
-              <a:t>Organise stock your way</a:t>
-            </a:r>
-            <a:endParaRPr lang="en-US" sz="2600" dirty="0"/>
-          </a:p>
-        </p:txBody>
-      </p:sp>
-      <p:sp>
-        <p:nvSpPr>
-          <p:cNvPr id="82" name="Shape 76"/>
-          <p:cNvSpPr/>
-          <p:nvPr/>
-        </p:nvSpPr>
-        <p:spPr>
-          <a:xfrm>
-            <a:off x="1008000" y="21384000"/>
-            <a:ext cx="4707000" cy="1080000"/>
-          </a:xfrm>
-          <a:prstGeom prst="roundRect">
-            <a:avLst>
-              <a:gd name="adj" fmla="val 10000"/>
-            </a:avLst>
-          </a:prstGeom>
-          <a:solidFill>
-            <a:srgbClr val="FFFFFF"/>
-          </a:solidFill>
-          <a:ln w="19050">
-            <a:solidFill>
-              <a:srgbClr val="DDDDDD"/>
-            </a:solidFill>
-            <a:prstDash val="solid"/>
-          </a:ln>
-        </p:spPr>
-      </p:sp>
-      <p:sp>
-        <p:nvSpPr>
-          <p:cNvPr id="83" name="Shape 77"/>
-          <p:cNvSpPr/>
-          <p:nvPr/>
-        </p:nvSpPr>
-        <p:spPr>
-          <a:xfrm>
-            <a:off x="1008000" y="21384000"/>
-            <a:ext cx="4707000" cy="90000"/>
-          </a:xfrm>
-          <a:prstGeom prst="rect">
-            <a:avLst>
-              <a:gd name="adj" fmla="val 120000"/>
-            </a:avLst>
-          </a:prstGeom>
-          <a:solidFill>
-            <a:srgbClr val="009CA6"/>
-          </a:solidFill>
-          <a:ln w="12700">
-            <a:solidFill>
-              <a:srgbClr val="009CA6"/>
-            </a:solidFill>
-            <a:prstDash val="solid"/>
-          </a:ln>
-        </p:spPr>
-      </p:sp>
-      <p:sp>
-        <p:nvSpPr>
-          <p:cNvPr id="84" name="Feature: Expiry alerts"/>
-          <p:cNvSpPr txBox="1"/>
-          <p:nvPr/>
-        </p:nvSpPr>
-        <p:spPr>
-          <a:xfrm>
-            <a:off x="1188000" y="21564000"/>
-            <a:ext cx="4383000" cy="828000"/>
-          </a:xfrm>
-          <a:prstGeom prst="rect">
-            <a:avLst/>
-          </a:prstGeom>
-          <a:noFill/>
-          <a:ln/>
-        </p:spPr>
-        <p:txBody>
-          <a:bodyPr wrap="square" lIns="0" tIns="0" rIns="0" bIns="0" rtlCol="0" anchor="t"/>
-          <a:lstStyle/>
-          <a:p>
-            <a:pPr indent="0" marL="0">
-              <a:lnSpc>
-                <a:spcPct val="100000"/>
-              </a:lnSpc>
-              <a:buNone/>
-            </a:pPr>
-            <a:r>
-              <a:rPr lang="en-US" sz="2600" b="1" dirty="0">
-                <a:solidFill>
-                  <a:srgbClr val="262626"/>
-                </a:solidFill>
-                <a:latin typeface="Arial" pitchFamily="34" charset="0"/>
-                <a:ea typeface="Arial" pitchFamily="34" charset="-122"/>
-                <a:cs typeface="Arial" pitchFamily="34" charset="-120"/>
-              </a:rPr>
-              <a:t>Expiry alerts</a:t>
-            </a:r>
-            <a:endParaRPr lang="en-US" sz="2600" dirty="0"/>
-          </a:p>
-          <a:p>
-            <a:pPr indent="0" marL="0">
-              <a:lnSpc>
-                <a:spcPct val="100000"/>
-              </a:lnSpc>
-              <a:buNone/>
-            </a:pPr>
-            <a:r>
-              <a:rPr lang="en-US" sz="2200" dirty="0">
-                <a:solidFill>
-                  <a:srgbClr val="444444"/>
-                </a:solidFill>
-                <a:latin typeface="Arial" pitchFamily="34" charset="0"/>
-                <a:ea typeface="Arial" pitchFamily="34" charset="-122"/>
-                <a:cs typeface="Arial" pitchFamily="34" charset="-120"/>
-              </a:rPr>
-              <a:t>Catch out-of-date stock</a:t>
-            </a:r>
-            <a:endParaRPr lang="en-US" sz="2600" dirty="0"/>
-          </a:p>
-        </p:txBody>
-      </p:sp>
-      <p:sp>
-        <p:nvSpPr>
-          <p:cNvPr id="85" name="Shape 79"/>
-          <p:cNvSpPr/>
-          <p:nvPr/>
-        </p:nvSpPr>
-        <p:spPr>
-          <a:xfrm>
-            <a:off x="5859000" y="21384000"/>
-            <a:ext cx="4707000" cy="1080000"/>
-          </a:xfrm>
-          <a:prstGeom prst="roundRect">
-            <a:avLst>
-              <a:gd name="adj" fmla="val 10000"/>
-            </a:avLst>
-          </a:prstGeom>
-          <a:solidFill>
-            <a:srgbClr val="FFFFFF"/>
-          </a:solidFill>
-          <a:ln w="19050">
-            <a:solidFill>
-              <a:srgbClr val="DDDDDD"/>
-            </a:solidFill>
-            <a:prstDash val="solid"/>
-          </a:ln>
-        </p:spPr>
-      </p:sp>
-      <p:sp>
-        <p:nvSpPr>
-          <p:cNvPr id="86" name="Shape 80"/>
-          <p:cNvSpPr/>
-          <p:nvPr/>
-        </p:nvSpPr>
-        <p:spPr>
-          <a:xfrm>
-            <a:off x="5859000" y="21384000"/>
-            <a:ext cx="4707000" cy="90000"/>
-          </a:xfrm>
-          <a:prstGeom prst="rect">
-            <a:avLst>
-              <a:gd name="adj" fmla="val 120000"/>
-            </a:avLst>
-          </a:prstGeom>
-          <a:solidFill>
-            <a:srgbClr val="009CA6"/>
-          </a:solidFill>
-          <a:ln w="12700">
-            <a:solidFill>
-              <a:srgbClr val="009CA6"/>
-            </a:solidFill>
-            <a:prstDash val="solid"/>
-          </a:ln>
-        </p:spPr>
-      </p:sp>
-      <p:sp>
-        <p:nvSpPr>
-          <p:cNvPr id="87" name="Feature: Search &amp; history"/>
-          <p:cNvSpPr txBox="1"/>
-          <p:nvPr/>
-        </p:nvSpPr>
-        <p:spPr>
-          <a:xfrm>
-            <a:off x="6039000" y="21564000"/>
-            <a:ext cx="4383000" cy="828000"/>
-          </a:xfrm>
-          <a:prstGeom prst="rect">
-            <a:avLst/>
-          </a:prstGeom>
-          <a:noFill/>
-          <a:ln/>
-        </p:spPr>
-        <p:txBody>
-          <a:bodyPr wrap="square" lIns="0" tIns="0" rIns="0" bIns="0" rtlCol="0" anchor="t"/>
-          <a:lstStyle/>
-          <a:p>
-            <a:pPr indent="0" marL="0">
-              <a:lnSpc>
-                <a:spcPct val="100000"/>
-              </a:lnSpc>
-              <a:buNone/>
-            </a:pPr>
-            <a:r>
-              <a:rPr lang="en-US" sz="2600" b="1" dirty="0">
-                <a:solidFill>
-                  <a:srgbClr val="262626"/>
-                </a:solidFill>
-                <a:latin typeface="Arial" pitchFamily="34" charset="0"/>
-                <a:ea typeface="Arial" pitchFamily="34" charset="-122"/>
-                <a:cs typeface="Arial" pitchFamily="34" charset="-120"/>
-              </a:rPr>
-              <a:t>Search &amp; history</a:t>
-            </a:r>
-            <a:endParaRPr lang="en-US" sz="2600" dirty="0"/>
-          </a:p>
-          <a:p>
-            <a:pPr indent="0" marL="0">
-              <a:lnSpc>
-                <a:spcPct val="100000"/>
-              </a:lnSpc>
-              <a:buNone/>
-            </a:pPr>
-            <a:r>
-              <a:rPr lang="en-US" sz="2200" dirty="0">
-                <a:solidFill>
-                  <a:srgbClr val="444444"/>
-                </a:solidFill>
-                <a:latin typeface="Arial" pitchFamily="34" charset="0"/>
-                <a:ea typeface="Arial" pitchFamily="34" charset="-122"/>
-                <a:cs typeface="Arial" pitchFamily="34" charset="-120"/>
-              </a:rPr>
-              <a:t>Full transaction trail</a:t>
-            </a:r>
-            <a:endParaRPr lang="en-US" sz="2600" dirty="0"/>
-          </a:p>
-        </p:txBody>
-      </p:sp>
-      <p:sp>
-        <p:nvSpPr>
-          <p:cNvPr id="88" name="Shape 82"/>
-          <p:cNvSpPr/>
-          <p:nvPr/>
-        </p:nvSpPr>
-        <p:spPr>
-          <a:xfrm>
-            <a:off x="1008000" y="22680000"/>
-            <a:ext cx="9558000" cy="2736000"/>
-          </a:xfrm>
-          <a:prstGeom prst="roundRect">
-            <a:avLst>
-              <a:gd name="adj" fmla="val 5263"/>
-            </a:avLst>
-          </a:prstGeom>
-          <a:solidFill>
-            <a:srgbClr val="F2F4F5"/>
-          </a:solidFill>
-          <a:ln w="12700">
-            <a:solidFill>
-              <a:srgbClr val="F2F4F5"/>
-            </a:solidFill>
-            <a:prstDash val="solid"/>
-          </a:ln>
-        </p:spPr>
-      </p:sp>
-      <p:sp>
-        <p:nvSpPr>
-          <p:cNvPr id="89" name="Text 83"/>
-          <p:cNvSpPr txBox="1"/>
-          <p:nvPr/>
-        </p:nvSpPr>
-        <p:spPr>
-          <a:xfrm>
-            <a:off x="1188000" y="22824000"/>
-            <a:ext cx="7200000" cy="396000"/>
-          </a:xfrm>
-          <a:prstGeom prst="rect">
-            <a:avLst/>
-          </a:prstGeom>
-          <a:noFill/>
-          <a:ln/>
-        </p:spPr>
-        <p:txBody>
-          <a:bodyPr wrap="square" lIns="0" tIns="0" rIns="0" bIns="0" rtlCol="0" anchor="t"/>
-          <a:lstStyle/>
-          <a:p>
-            <a:pPr indent="0" marL="0">
-              <a:buNone/>
-            </a:pPr>
-            <a:r>
-              <a:rPr lang="en-US" sz="2600" b="1" dirty="0">
-                <a:solidFill>
-                  <a:srgbClr val="262626"/>
-                </a:solidFill>
-                <a:latin typeface="Arial" pitchFamily="34" charset="0"/>
-                <a:ea typeface="Arial" pitchFamily="34" charset="-122"/>
-                <a:cs typeface="Arial" pitchFamily="34" charset="-120"/>
-              </a:rPr>
-              <a:t>How it fits together</a:t>
-            </a:r>
-            <a:endParaRPr lang="en-US" sz="2600" dirty="0"/>
-          </a:p>
-        </p:txBody>
-      </p:sp>
-      <p:sp>
-        <p:nvSpPr>
-          <p:cNvPr id="90" name="Shape 84"/>
-          <p:cNvSpPr/>
-          <p:nvPr/>
-        </p:nvSpPr>
-        <p:spPr>
-          <a:xfrm>
-            <a:off x="1188000" y="23400000"/>
-            <a:ext cx="1872000" cy="1224000"/>
-          </a:xfrm>
-          <a:prstGeom prst="roundRect">
-            <a:avLst>
-              <a:gd name="adj" fmla="val 8824"/>
-            </a:avLst>
-          </a:prstGeom>
-          <a:solidFill>
-            <a:srgbClr val="7B57CB"/>
-          </a:solidFill>
-          <a:ln w="12700">
-            <a:solidFill>
-              <a:srgbClr val="7B57CB"/>
-            </a:solidFill>
-            <a:prstDash val="solid"/>
-          </a:ln>
-        </p:spPr>
-      </p:sp>
-      <p:sp>
-        <p:nvSpPr>
-          <p:cNvPr id="91" name="Arch: Daymap"/>
-          <p:cNvSpPr txBox="1"/>
-          <p:nvPr/>
-        </p:nvSpPr>
-        <p:spPr>
-          <a:xfrm>
-            <a:off x="1188000" y="23400000"/>
-            <a:ext cx="1872000" cy="1224000"/>
-          </a:xfrm>
-          <a:prstGeom prst="rect">
-            <a:avLst/>
-          </a:prstGeom>
-          <a:noFill/>
-          <a:ln/>
-        </p:spPr>
-        <p:txBody>
-          <a:bodyPr wrap="square" lIns="0" tIns="0" rIns="0" bIns="0" rtlCol="0" anchor="ctr"/>
-          <a:lstStyle/>
-          <a:p>
-            <a:pPr algn="ctr" indent="0" marL="0">
-              <a:buNone/>
-            </a:pPr>
-            <a:r>
-              <a:rPr lang="en-US" sz="2400" b="1" dirty="0">
-                <a:solidFill>
-                  <a:srgbClr val="FFFFFF"/>
-                </a:solidFill>
-                <a:latin typeface="Arial" pitchFamily="34" charset="0"/>
-                <a:ea typeface="Arial" pitchFamily="34" charset="-122"/>
-                <a:cs typeface="Arial" pitchFamily="34" charset="-120"/>
-              </a:rPr>
-              <a:t>Daymap</a:t>
-            </a:r>
-            <a:endParaRPr lang="en-US" sz="2400" dirty="0"/>
-          </a:p>
-        </p:txBody>
-      </p:sp>
-      <p:sp>
-        <p:nvSpPr>
-          <p:cNvPr id="92" name="Shape 86"/>
-          <p:cNvSpPr/>
-          <p:nvPr/>
-        </p:nvSpPr>
-        <p:spPr>
-          <a:xfrm>
-            <a:off x="3096000" y="24012000"/>
-            <a:ext cx="360000" cy="0"/>
-          </a:xfrm>
-          <a:prstGeom prst="line">
-            <a:avLst/>
-          </a:prstGeom>
-          <a:noFill/>
-          <a:ln w="38100">
-            <a:solidFill>
-              <a:srgbClr val="262626"/>
-            </a:solidFill>
-            <a:prstDash val="solid"/>
-            <a:tailEnd type="triangle"/>
-          </a:ln>
-        </p:spPr>
-      </p:sp>
-      <p:sp>
-        <p:nvSpPr>
-          <p:cNvPr id="93" name="Shape 87"/>
-          <p:cNvSpPr/>
-          <p:nvPr/>
-        </p:nvSpPr>
-        <p:spPr>
-          <a:xfrm>
-            <a:off x="3492000" y="23400000"/>
-            <a:ext cx="1872000" cy="1224000"/>
-          </a:xfrm>
-          <a:prstGeom prst="roundRect">
-            <a:avLst>
-              <a:gd name="adj" fmla="val 8824"/>
-            </a:avLst>
-          </a:prstGeom>
-          <a:solidFill>
-            <a:srgbClr val="009CA6"/>
-          </a:solidFill>
-          <a:ln w="12700">
-            <a:solidFill>
-              <a:srgbClr val="009CA6"/>
-            </a:solidFill>
-            <a:prstDash val="solid"/>
-          </a:ln>
-        </p:spPr>
-      </p:sp>
-      <p:sp>
-        <p:nvSpPr>
-          <p:cNvPr id="94" name="Arch: REST API"/>
-          <p:cNvSpPr txBox="1"/>
-          <p:nvPr/>
-        </p:nvSpPr>
-        <p:spPr>
-          <a:xfrm>
-            <a:off x="3492000" y="23400000"/>
-            <a:ext cx="1872000" cy="1224000"/>
-          </a:xfrm>
-          <a:prstGeom prst="rect">
-            <a:avLst/>
-          </a:prstGeom>
-          <a:noFill/>
-          <a:ln/>
-        </p:spPr>
-        <p:txBody>
-          <a:bodyPr wrap="square" lIns="0" tIns="0" rIns="0" bIns="0" rtlCol="0" anchor="ctr"/>
-          <a:lstStyle/>
-          <a:p>
-            <a:pPr algn="ctr" indent="0" marL="0">
-              <a:buNone/>
-            </a:pPr>
-            <a:r>
-              <a:rPr lang="en-US" sz="2400" b="1" dirty="0">
-                <a:solidFill>
-                  <a:srgbClr val="FFFFFF"/>
-                </a:solidFill>
-                <a:latin typeface="Arial" pitchFamily="34" charset="0"/>
-                <a:ea typeface="Arial" pitchFamily="34" charset="-122"/>
-                <a:cs typeface="Arial" pitchFamily="34" charset="-120"/>
-              </a:rPr>
-              <a:t>REST API</a:t>
-            </a:r>
-            <a:endParaRPr lang="en-US" sz="2400" dirty="0"/>
-          </a:p>
-        </p:txBody>
-      </p:sp>
-      <p:sp>
-        <p:nvSpPr>
-          <p:cNvPr id="95" name="Shape 89"/>
-          <p:cNvSpPr/>
-          <p:nvPr/>
-        </p:nvSpPr>
-        <p:spPr>
-          <a:xfrm>
-            <a:off x="5400000" y="24012000"/>
-            <a:ext cx="360000" cy="0"/>
-          </a:xfrm>
-          <a:prstGeom prst="line">
-            <a:avLst/>
-          </a:prstGeom>
-          <a:noFill/>
-          <a:ln w="38100">
-            <a:solidFill>
-              <a:srgbClr val="262626"/>
-            </a:solidFill>
-            <a:prstDash val="solid"/>
-            <a:tailEnd type="triangle"/>
-          </a:ln>
-        </p:spPr>
-      </p:sp>
-      <p:sp>
-        <p:nvSpPr>
-          <p:cNvPr id="96" name="Shape 90"/>
-          <p:cNvSpPr/>
-          <p:nvPr/>
-        </p:nvSpPr>
-        <p:spPr>
-          <a:xfrm>
-            <a:off x="5796000" y="23400000"/>
-            <a:ext cx="1872000" cy="1224000"/>
-          </a:xfrm>
-          <a:prstGeom prst="roundRect">
-            <a:avLst>
-              <a:gd name="adj" fmla="val 8824"/>
-            </a:avLst>
-          </a:prstGeom>
-          <a:solidFill>
-            <a:srgbClr val="009CA6"/>
-          </a:solidFill>
-          <a:ln w="12700">
-            <a:solidFill>
-              <a:srgbClr val="009CA6"/>
-            </a:solidFill>
-            <a:prstDash val="solid"/>
-          </a:ln>
-        </p:spPr>
-      </p:sp>
-      <p:sp>
-        <p:nvSpPr>
-          <p:cNvPr id="97" name="Arch: Data layer"/>
-          <p:cNvSpPr txBox="1"/>
-          <p:nvPr/>
-        </p:nvSpPr>
-        <p:spPr>
-          <a:xfrm>
-            <a:off x="5796000" y="23400000"/>
-            <a:ext cx="1872000" cy="1224000"/>
-          </a:xfrm>
-          <a:prstGeom prst="rect">
-            <a:avLst/>
-          </a:prstGeom>
-          <a:noFill/>
-          <a:ln/>
-        </p:spPr>
-        <p:txBody>
-          <a:bodyPr wrap="square" lIns="0" tIns="0" rIns="0" bIns="0" rtlCol="0" anchor="ctr"/>
-          <a:lstStyle/>
-          <a:p>
-            <a:pPr algn="ctr" indent="0" marL="0">
-              <a:buNone/>
-            </a:pPr>
-            <a:r>
-              <a:rPr lang="en-US" sz="2400" b="1" dirty="0">
-                <a:solidFill>
-                  <a:srgbClr val="FFFFFF"/>
-                </a:solidFill>
-                <a:latin typeface="Arial" pitchFamily="34" charset="0"/>
-                <a:ea typeface="Arial" pitchFamily="34" charset="-122"/>
-                <a:cs typeface="Arial" pitchFamily="34" charset="-120"/>
-              </a:rPr>
-              <a:t>Data layer</a:t>
-            </a:r>
-            <a:endParaRPr lang="en-US" sz="2400" dirty="0"/>
-          </a:p>
-        </p:txBody>
-      </p:sp>
-      <p:sp>
-        <p:nvSpPr>
-          <p:cNvPr id="98" name="Shape 92"/>
-          <p:cNvSpPr/>
-          <p:nvPr/>
-        </p:nvSpPr>
-        <p:spPr>
-          <a:xfrm>
-            <a:off x="7704000" y="24012000"/>
-            <a:ext cx="360000" cy="0"/>
-          </a:xfrm>
-          <a:prstGeom prst="line">
-            <a:avLst/>
-          </a:prstGeom>
-          <a:noFill/>
-          <a:ln w="38100">
-            <a:solidFill>
-              <a:srgbClr val="262626"/>
-            </a:solidFill>
-            <a:prstDash val="solid"/>
-            <a:tailEnd type="triangle"/>
-          </a:ln>
-        </p:spPr>
-      </p:sp>
-      <p:sp>
-        <p:nvSpPr>
-          <p:cNvPr id="99" name="Shape 93"/>
-          <p:cNvSpPr/>
-          <p:nvPr/>
-        </p:nvSpPr>
-        <p:spPr>
-          <a:xfrm>
-            <a:off x="8100000" y="23400000"/>
-            <a:ext cx="1872000" cy="1224000"/>
-          </a:xfrm>
-          <a:prstGeom prst="roundRect">
-            <a:avLst>
-              <a:gd name="adj" fmla="val 8824"/>
-            </a:avLst>
-          </a:prstGeom>
-          <a:solidFill>
-            <a:srgbClr val="262626"/>
-          </a:solidFill>
-          <a:ln w="12700">
-            <a:solidFill>
-              <a:srgbClr val="262626"/>
-            </a:solidFill>
-            <a:prstDash val="solid"/>
-          </a:ln>
-        </p:spPr>
-      </p:sp>
-      <p:sp>
-        <p:nvSpPr>
-          <p:cNvPr id="100" name="Arch: SQL Server"/>
-          <p:cNvSpPr txBox="1"/>
-          <p:nvPr/>
-        </p:nvSpPr>
-        <p:spPr>
-          <a:xfrm>
-            <a:off x="8100000" y="23400000"/>
-            <a:ext cx="1872000" cy="1224000"/>
-          </a:xfrm>
-          <a:prstGeom prst="rect">
-            <a:avLst/>
-          </a:prstGeom>
-          <a:noFill/>
-          <a:ln/>
-        </p:spPr>
-        <p:txBody>
-          <a:bodyPr wrap="square" lIns="0" tIns="0" rIns="0" bIns="0" rtlCol="0" anchor="ctr"/>
-          <a:lstStyle/>
-          <a:p>
-            <a:pPr algn="ctr" indent="0" marL="0">
-              <a:buNone/>
-            </a:pPr>
-            <a:r>
-              <a:rPr lang="en-US" sz="2400" b="1" dirty="0">
-                <a:solidFill>
-                  <a:srgbClr val="FFFFFF"/>
-                </a:solidFill>
-                <a:latin typeface="Arial" pitchFamily="34" charset="0"/>
-                <a:ea typeface="Arial" pitchFamily="34" charset="-122"/>
-                <a:cs typeface="Arial" pitchFamily="34" charset="-120"/>
-              </a:rPr>
-              <a:t>SQL Server</a:t>
-            </a:r>
-            <a:endParaRPr lang="en-US" sz="2400" dirty="0"/>
-          </a:p>
-        </p:txBody>
-      </p:sp>
-      <p:sp>
-        <p:nvSpPr>
-          <p:cNvPr id="101" name="Text 95"/>
-          <p:cNvSpPr txBox="1"/>
-          <p:nvPr/>
-        </p:nvSpPr>
-        <p:spPr>
-          <a:xfrm>
-            <a:off x="1188000" y="24840000"/>
-            <a:ext cx="9180000" cy="396000"/>
-          </a:xfrm>
-          <a:prstGeom prst="rect">
-            <a:avLst/>
-          </a:prstGeom>
-          <a:noFill/>
-          <a:ln/>
-        </p:spPr>
-        <p:txBody>
-          <a:bodyPr wrap="square" lIns="0" tIns="0" rIns="0" bIns="0" rtlCol="0" anchor="t"/>
-          <a:lstStyle/>
-          <a:p>
-            <a:pPr algn="ctr" indent="0" marL="0">
-              <a:buNone/>
-            </a:pPr>
-            <a:r>
-              <a:rPr lang="en-US" sz="2200" dirty="0">
-                <a:solidFill>
-                  <a:srgbClr val="444444"/>
-                </a:solidFill>
-                <a:latin typeface="Arial" pitchFamily="34" charset="0"/>
-                <a:ea typeface="Arial" pitchFamily="34" charset="-122"/>
-                <a:cs typeface="Arial" pitchFamily="34" charset="-120"/>
-              </a:rPr>
-              <a:t>ASP.NET Core · .NET 8 · EF Core · Docker</a:t>
-            </a:r>
-            <a:endParaRPr lang="en-US" sz="2200" dirty="0"/>
-          </a:p>
-        </p:txBody>
-      </p:sp>
-      <p:sp>
-        <p:nvSpPr>
-          <p:cNvPr id="102" name="Shape 96"/>
-          <p:cNvSpPr/>
-          <p:nvPr/>
-        </p:nvSpPr>
-        <p:spPr>
-          <a:xfrm>
-            <a:off x="10818000" y="18936000"/>
-            <a:ext cx="9558000" cy="6012000"/>
-          </a:xfrm>
-          <a:prstGeom prst="roundRect">
-            <a:avLst>
-              <a:gd name="adj" fmla="val 2395"/>
+              <a:gd name="adj" fmla="val 3911"/>
             </a:avLst>
           </a:prstGeom>
           <a:solidFill>
@@ -4672,13 +3277,13 @@
       </p:sp>
       <p:sp>
         <p:nvSpPr>
-          <p:cNvPr id="103" name="Shape 97"/>
+          <p:cNvPr id="65" name="Shape 59"/>
           <p:cNvSpPr/>
           <p:nvPr/>
         </p:nvSpPr>
         <p:spPr>
           <a:xfrm>
-            <a:off x="10818000" y="18936000"/>
+            <a:off x="10818000" y="16488000"/>
             <a:ext cx="9558000" cy="432000"/>
           </a:xfrm>
           <a:prstGeom prst="roundRect">
@@ -4699,13 +3304,13 @@
       </p:sp>
       <p:sp>
         <p:nvSpPr>
-          <p:cNvPr id="104" name="Shape 98"/>
+          <p:cNvPr id="66" name="Shape 60"/>
           <p:cNvSpPr/>
           <p:nvPr/>
         </p:nvSpPr>
         <p:spPr>
           <a:xfrm>
-            <a:off x="10818000" y="19152000"/>
+            <a:off x="10818000" y="16704000"/>
             <a:ext cx="9558000" cy="216000"/>
           </a:xfrm>
           <a:prstGeom prst="rect">
@@ -4726,13 +3331,13 @@
       </p:sp>
       <p:sp>
         <p:nvSpPr>
-          <p:cNvPr id="105" name="Shape 99"/>
+          <p:cNvPr id="67" name="Shape 61"/>
           <p:cNvSpPr/>
           <p:nvPr/>
         </p:nvSpPr>
         <p:spPr>
           <a:xfrm>
-            <a:off x="10998000" y="19071000"/>
+            <a:off x="10998000" y="16623000"/>
             <a:ext cx="162000" cy="162000"/>
           </a:xfrm>
           <a:prstGeom prst="ellipse">
@@ -4746,13 +3351,13 @@
       </p:sp>
       <p:sp>
         <p:nvSpPr>
-          <p:cNvPr id="106" name="Shape 100"/>
+          <p:cNvPr id="68" name="Shape 62"/>
           <p:cNvSpPr/>
           <p:nvPr/>
         </p:nvSpPr>
         <p:spPr>
           <a:xfrm>
-            <a:off x="11250000" y="19071000"/>
+            <a:off x="11250000" y="16623000"/>
             <a:ext cx="162000" cy="162000"/>
           </a:xfrm>
           <a:prstGeom prst="ellipse">
@@ -4766,13 +3371,13 @@
       </p:sp>
       <p:sp>
         <p:nvSpPr>
-          <p:cNvPr id="107" name="Shape 101"/>
+          <p:cNvPr id="69" name="Shape 63"/>
           <p:cNvSpPr/>
           <p:nvPr/>
         </p:nvSpPr>
         <p:spPr>
           <a:xfrm>
-            <a:off x="11502000" y="19071000"/>
+            <a:off x="11502000" y="16623000"/>
             <a:ext cx="162000" cy="162000"/>
           </a:xfrm>
           <a:prstGeom prst="ellipse">
@@ -4786,13 +3391,13 @@
       </p:sp>
       <p:sp>
         <p:nvSpPr>
-          <p:cNvPr id="108" name="Text 102"/>
+          <p:cNvPr id="70" name="Text 64"/>
           <p:cNvSpPr txBox="1"/>
           <p:nvPr/>
         </p:nvSpPr>
         <p:spPr>
           <a:xfrm>
-            <a:off x="11898000" y="18936000"/>
+            <a:off x="11898000" y="16488000"/>
             <a:ext cx="7200000" cy="432000"/>
           </a:xfrm>
           <a:prstGeom prst="rect">
@@ -4825,7 +3430,7 @@
       </p:sp>
       <p:pic>
         <p:nvPicPr>
-          <p:cNvPr id="109" name="Swagger screenshot" descr="C:\Users\Aaron\AppData\Local\Temp\claude\C--Users-Aaron-Desktop-ict30017-P01-inventory-management-schools\97f81feb-cc42-48d2-a7dc-9fa67447c472\scratchpad\pptx\swagger_items_crop.png">    </p:cNvPr>
+          <p:cNvPr id="71" name="Swagger screenshot" descr="C:\Users\Aaron\AppData\Local\Temp\claude\C--Users-Aaron-Desktop-ict30017-P01-inventory-management-schools\97f81feb-cc42-48d2-a7dc-9fa67447c472\scratchpad\pptx\swagger_3rows.png">    </p:cNvPr>
           <p:cNvPicPr>
             <a:picLocks noChangeAspect="1"/>
           </p:cNvPicPr>
@@ -4833,13 +3438,14 @@
         </p:nvPicPr>
         <p:blipFill>
           <a:blip r:embed="rId5"/>
-          <a:srcRect l="0" r="0" t="0" b="0"/>
-          <a:stretch/>
+          <a:stretch>
+            <a:fillRect/>
+          </a:stretch>
         </p:blipFill>
         <p:spPr>
           <a:xfrm>
-            <a:off x="10836000" y="19368000"/>
-            <a:ext cx="9522000" cy="5535302"/>
+            <a:off x="10836000" y="16920000"/>
+            <a:ext cx="9522000" cy="3231593"/>
           </a:xfrm>
           <a:prstGeom prst="rect">
             <a:avLst/>
@@ -4848,13 +3454,13 @@
       </p:pic>
       <p:sp>
         <p:nvSpPr>
-          <p:cNvPr id="110" name="Text 103"/>
+          <p:cNvPr id="72" name="Text 65"/>
           <p:cNvSpPr txBox="1"/>
           <p:nvPr/>
         </p:nvSpPr>
         <p:spPr>
           <a:xfrm>
-            <a:off x="10818000" y="25020000"/>
+            <a:off x="10818000" y="20304000"/>
             <a:ext cx="9558000" cy="360000"/>
           </a:xfrm>
           <a:prstGeom prst="rect">
@@ -4887,18 +3493,18 @@
       </p:sp>
       <p:sp>
         <p:nvSpPr>
-          <p:cNvPr id="111" name="Shape 104"/>
+          <p:cNvPr id="73" name="Shape 66"/>
           <p:cNvSpPr/>
           <p:nvPr/>
         </p:nvSpPr>
         <p:spPr>
           <a:xfrm>
-            <a:off x="1008000" y="25632000"/>
-            <a:ext cx="19368000" cy="1296000"/>
+            <a:off x="1008000" y="21816000"/>
+            <a:ext cx="19368000" cy="4896000"/>
           </a:xfrm>
           <a:prstGeom prst="roundRect">
             <a:avLst>
-              <a:gd name="adj" fmla="val 11111"/>
+              <a:gd name="adj" fmla="val 3676"/>
             </a:avLst>
           </a:prstGeom>
           <a:solidFill>
@@ -4914,30 +3520,30 @@
       </p:sp>
       <p:sp>
         <p:nvSpPr>
-          <p:cNvPr id="112" name="Why it matters"/>
+          <p:cNvPr id="74" name="Benefits heading"/>
           <p:cNvSpPr txBox="1"/>
           <p:nvPr/>
         </p:nvSpPr>
         <p:spPr>
           <a:xfrm>
-            <a:off x="1296000" y="25632000"/>
-            <a:ext cx="18792000" cy="1296000"/>
-          </a:xfrm>
-          <a:prstGeom prst="rect">
-            <a:avLst/>
-          </a:prstGeom>
-          <a:noFill/>
-          <a:ln/>
-        </p:spPr>
-        <p:txBody>
-          <a:bodyPr wrap="square" lIns="0" tIns="0" rIns="0" bIns="0" rtlCol="0" anchor="ctr"/>
-          <a:lstStyle/>
-          <a:p>
-            <a:pPr indent="0" marL="0">
-              <a:buNone/>
-            </a:pPr>
-            <a:r>
-              <a:rPr lang="en-US" sz="3000" b="1" dirty="0">
+            <a:off x="1440000" y="22104000"/>
+            <a:ext cx="14400000" cy="648000"/>
+          </a:xfrm>
+          <a:prstGeom prst="rect">
+            <a:avLst/>
+          </a:prstGeom>
+          <a:noFill/>
+          <a:ln/>
+        </p:spPr>
+        <p:txBody>
+          <a:bodyPr wrap="square" lIns="0" tIns="0" rIns="0" bIns="0" rtlCol="0" anchor="t"/>
+          <a:lstStyle/>
+          <a:p>
+            <a:pPr indent="0" marL="0">
+              <a:buNone/>
+            </a:pPr>
+            <a:r>
+              <a:rPr lang="en-US" sz="4400" b="1" spc="100" kern="0" dirty="0">
                 <a:solidFill>
                   <a:srgbClr val="FFFFFF"/>
                 </a:solidFill>
@@ -4945,13 +3551,62 @@
                 <a:ea typeface="Arial" pitchFamily="34" charset="-122"/>
                 <a:cs typeface="Arial" pitchFamily="34" charset="-120"/>
               </a:rPr>
-              <a:t>Why it matters: </a:t>
-            </a:r>
-            <a:pPr indent="0" marL="0">
-              <a:buNone/>
-            </a:pPr>
-            <a:r>
-              <a:rPr lang="en-US" sz="3000" dirty="0">
+              <a:t>WHAT SCHOOLS GAIN</a:t>
+            </a:r>
+            <a:endParaRPr lang="en-US" sz="4400" dirty="0"/>
+          </a:p>
+        </p:txBody>
+      </p:sp>
+      <p:sp>
+        <p:nvSpPr>
+          <p:cNvPr id="75" name="Shape 68"/>
+          <p:cNvSpPr/>
+          <p:nvPr/>
+        </p:nvSpPr>
+        <p:spPr>
+          <a:xfrm>
+            <a:off x="1440000" y="23112000"/>
+            <a:ext cx="5928000" cy="3240000"/>
+          </a:xfrm>
+          <a:prstGeom prst="roundRect">
+            <a:avLst>
+              <a:gd name="adj" fmla="val 4444"/>
+            </a:avLst>
+          </a:prstGeom>
+          <a:solidFill>
+            <a:srgbClr val="FFFFFF">
+              <a:alpha val="15000"/>
+            </a:srgbClr>
+          </a:solidFill>
+          <a:ln/>
+        </p:spPr>
+      </p:sp>
+      <p:sp>
+        <p:nvSpPr>
+          <p:cNvPr id="76" name="Text 69"/>
+          <p:cNvSpPr txBox="1"/>
+          <p:nvPr/>
+        </p:nvSpPr>
+        <p:spPr>
+          <a:xfrm>
+            <a:off x="1692000" y="23220000"/>
+            <a:ext cx="720000" cy="792000"/>
+          </a:xfrm>
+          <a:prstGeom prst="rect">
+            <a:avLst/>
+          </a:prstGeom>
+          <a:noFill/>
+          <a:ln/>
+        </p:spPr>
+        <p:txBody>
+          <a:bodyPr wrap="square" lIns="0" tIns="0" rIns="0" bIns="0" rtlCol="0" anchor="t"/>
+          <a:lstStyle/>
+          <a:p>
+            <a:pPr indent="0" marL="0">
+              <a:buNone/>
+            </a:pPr>
+            <a:r>
+              <a:rPr lang="en-US" sz="5400" b="1" dirty="0">
                 <a:solidFill>
                   <a:srgbClr val="FFFFFF"/>
                 </a:solidFill>
@@ -4959,15 +3614,345 @@
                 <a:ea typeface="Arial" pitchFamily="34" charset="-122"/>
                 <a:cs typeface="Arial" pitchFamily="34" charset="-120"/>
               </a:rPr>
-              <a:t>less time chasing equipment, fewer lost and expired items, and one trusted record of everything a school owns.</a:t>
-            </a:r>
-            <a:endParaRPr lang="en-US" sz="3000" dirty="0"/>
-          </a:p>
-        </p:txBody>
-      </p:sp>
-      <p:sp>
-        <p:nvSpPr>
-          <p:cNvPr id="113" name="Shape 106"/>
+              <a:t>1</a:t>
+            </a:r>
+            <a:endParaRPr lang="en-US" sz="5400" dirty="0"/>
+          </a:p>
+        </p:txBody>
+      </p:sp>
+      <p:sp>
+        <p:nvSpPr>
+          <p:cNvPr id="77" name="Benefit: Save staff time"/>
+          <p:cNvSpPr txBox="1"/>
+          <p:nvPr/>
+        </p:nvSpPr>
+        <p:spPr>
+          <a:xfrm>
+            <a:off x="1692000" y="24120000"/>
+            <a:ext cx="5424000" cy="2160000"/>
+          </a:xfrm>
+          <a:prstGeom prst="rect">
+            <a:avLst/>
+          </a:prstGeom>
+          <a:noFill/>
+          <a:ln/>
+        </p:spPr>
+        <p:txBody>
+          <a:bodyPr wrap="square" lIns="0" tIns="0" rIns="0" bIns="0" rtlCol="0" anchor="t"/>
+          <a:lstStyle/>
+          <a:p>
+            <a:pPr indent="0" marL="0">
+              <a:lnSpc>
+                <a:spcPct val="105000"/>
+              </a:lnSpc>
+              <a:spcAft>
+                <a:spcPts val="600"/>
+              </a:spcAft>
+              <a:buNone/>
+            </a:pPr>
+            <a:r>
+              <a:rPr lang="en-US" sz="3400" b="1" dirty="0">
+                <a:solidFill>
+                  <a:srgbClr val="FFFFFF"/>
+                </a:solidFill>
+                <a:latin typeface="Arial" pitchFamily="34" charset="0"/>
+                <a:ea typeface="Arial" pitchFamily="34" charset="-122"/>
+                <a:cs typeface="Arial" pitchFamily="34" charset="-120"/>
+              </a:rPr>
+              <a:t>Save staff time</a:t>
+            </a:r>
+            <a:endParaRPr lang="en-US" sz="3400" dirty="0"/>
+          </a:p>
+          <a:p>
+            <a:pPr indent="0" marL="0">
+              <a:lnSpc>
+                <a:spcPct val="105000"/>
+              </a:lnSpc>
+              <a:spcAft>
+                <a:spcPts val="600"/>
+              </a:spcAft>
+              <a:buNone/>
+            </a:pPr>
+            <a:r>
+              <a:rPr lang="en-US" sz="2800" dirty="0">
+                <a:solidFill>
+                  <a:srgbClr val="FFFFFF"/>
+                </a:solidFill>
+                <a:latin typeface="Arial" pitchFamily="34" charset="0"/>
+                <a:ea typeface="Arial" pitchFamily="34" charset="-122"/>
+                <a:cs typeface="Arial" pitchFamily="34" charset="-120"/>
+              </a:rPr>
+              <a:t>See who has any item and when it's due back.</a:t>
+            </a:r>
+            <a:endParaRPr lang="en-US" sz="3400" dirty="0"/>
+          </a:p>
+        </p:txBody>
+      </p:sp>
+      <p:sp>
+        <p:nvSpPr>
+          <p:cNvPr id="78" name="Shape 71"/>
+          <p:cNvSpPr/>
+          <p:nvPr/>
+        </p:nvSpPr>
+        <p:spPr>
+          <a:xfrm>
+            <a:off x="7728000" y="23112000"/>
+            <a:ext cx="5928000" cy="3240000"/>
+          </a:xfrm>
+          <a:prstGeom prst="roundRect">
+            <a:avLst>
+              <a:gd name="adj" fmla="val 4444"/>
+            </a:avLst>
+          </a:prstGeom>
+          <a:solidFill>
+            <a:srgbClr val="FFFFFF">
+              <a:alpha val="15000"/>
+            </a:srgbClr>
+          </a:solidFill>
+          <a:ln/>
+        </p:spPr>
+      </p:sp>
+      <p:sp>
+        <p:nvSpPr>
+          <p:cNvPr id="79" name="Text 72"/>
+          <p:cNvSpPr txBox="1"/>
+          <p:nvPr/>
+        </p:nvSpPr>
+        <p:spPr>
+          <a:xfrm>
+            <a:off x="7980000" y="23220000"/>
+            <a:ext cx="720000" cy="792000"/>
+          </a:xfrm>
+          <a:prstGeom prst="rect">
+            <a:avLst/>
+          </a:prstGeom>
+          <a:noFill/>
+          <a:ln/>
+        </p:spPr>
+        <p:txBody>
+          <a:bodyPr wrap="square" lIns="0" tIns="0" rIns="0" bIns="0" rtlCol="0" anchor="t"/>
+          <a:lstStyle/>
+          <a:p>
+            <a:pPr indent="0" marL="0">
+              <a:buNone/>
+            </a:pPr>
+            <a:r>
+              <a:rPr lang="en-US" sz="5400" b="1" dirty="0">
+                <a:solidFill>
+                  <a:srgbClr val="FFFFFF"/>
+                </a:solidFill>
+                <a:latin typeface="Arial" pitchFamily="34" charset="0"/>
+                <a:ea typeface="Arial" pitchFamily="34" charset="-122"/>
+                <a:cs typeface="Arial" pitchFamily="34" charset="-120"/>
+              </a:rPr>
+              <a:t>2</a:t>
+            </a:r>
+            <a:endParaRPr lang="en-US" sz="5400" dirty="0"/>
+          </a:p>
+        </p:txBody>
+      </p:sp>
+      <p:sp>
+        <p:nvSpPr>
+          <p:cNvPr id="80" name="Benefit: Fewer losses"/>
+          <p:cNvSpPr txBox="1"/>
+          <p:nvPr/>
+        </p:nvSpPr>
+        <p:spPr>
+          <a:xfrm>
+            <a:off x="7980000" y="24120000"/>
+            <a:ext cx="5424000" cy="2160000"/>
+          </a:xfrm>
+          <a:prstGeom prst="rect">
+            <a:avLst/>
+          </a:prstGeom>
+          <a:noFill/>
+          <a:ln/>
+        </p:spPr>
+        <p:txBody>
+          <a:bodyPr wrap="square" lIns="0" tIns="0" rIns="0" bIns="0" rtlCol="0" anchor="t"/>
+          <a:lstStyle/>
+          <a:p>
+            <a:pPr indent="0" marL="0">
+              <a:lnSpc>
+                <a:spcPct val="105000"/>
+              </a:lnSpc>
+              <a:spcAft>
+                <a:spcPts val="600"/>
+              </a:spcAft>
+              <a:buNone/>
+            </a:pPr>
+            <a:r>
+              <a:rPr lang="en-US" sz="3400" b="1" dirty="0">
+                <a:solidFill>
+                  <a:srgbClr val="FFFFFF"/>
+                </a:solidFill>
+                <a:latin typeface="Arial" pitchFamily="34" charset="0"/>
+                <a:ea typeface="Arial" pitchFamily="34" charset="-122"/>
+                <a:cs typeface="Arial" pitchFamily="34" charset="-120"/>
+              </a:rPr>
+              <a:t>Fewer losses</a:t>
+            </a:r>
+            <a:endParaRPr lang="en-US" sz="3400" dirty="0"/>
+          </a:p>
+          <a:p>
+            <a:pPr indent="0" marL="0">
+              <a:lnSpc>
+                <a:spcPct val="105000"/>
+              </a:lnSpc>
+              <a:spcAft>
+                <a:spcPts val="600"/>
+              </a:spcAft>
+              <a:buNone/>
+            </a:pPr>
+            <a:r>
+              <a:rPr lang="en-US" sz="2800" dirty="0">
+                <a:solidFill>
+                  <a:srgbClr val="FFFFFF"/>
+                </a:solidFill>
+                <a:latin typeface="Arial" pitchFamily="34" charset="0"/>
+                <a:ea typeface="Arial" pitchFamily="34" charset="-122"/>
+                <a:cs typeface="Arial" pitchFamily="34" charset="-120"/>
+              </a:rPr>
+              <a:t>Overdue loans and expiring stock are flagged early.</a:t>
+            </a:r>
+            <a:endParaRPr lang="en-US" sz="3400" dirty="0"/>
+          </a:p>
+        </p:txBody>
+      </p:sp>
+      <p:sp>
+        <p:nvSpPr>
+          <p:cNvPr id="81" name="Shape 74"/>
+          <p:cNvSpPr/>
+          <p:nvPr/>
+        </p:nvSpPr>
+        <p:spPr>
+          <a:xfrm>
+            <a:off x="14016000" y="23112000"/>
+            <a:ext cx="5928000" cy="3240000"/>
+          </a:xfrm>
+          <a:prstGeom prst="roundRect">
+            <a:avLst>
+              <a:gd name="adj" fmla="val 4444"/>
+            </a:avLst>
+          </a:prstGeom>
+          <a:solidFill>
+            <a:srgbClr val="FFFFFF">
+              <a:alpha val="15000"/>
+            </a:srgbClr>
+          </a:solidFill>
+          <a:ln/>
+        </p:spPr>
+      </p:sp>
+      <p:sp>
+        <p:nvSpPr>
+          <p:cNvPr id="82" name="Text 75"/>
+          <p:cNvSpPr txBox="1"/>
+          <p:nvPr/>
+        </p:nvSpPr>
+        <p:spPr>
+          <a:xfrm>
+            <a:off x="14268000" y="23220000"/>
+            <a:ext cx="720000" cy="792000"/>
+          </a:xfrm>
+          <a:prstGeom prst="rect">
+            <a:avLst/>
+          </a:prstGeom>
+          <a:noFill/>
+          <a:ln/>
+        </p:spPr>
+        <p:txBody>
+          <a:bodyPr wrap="square" lIns="0" tIns="0" rIns="0" bIns="0" rtlCol="0" anchor="t"/>
+          <a:lstStyle/>
+          <a:p>
+            <a:pPr indent="0" marL="0">
+              <a:buNone/>
+            </a:pPr>
+            <a:r>
+              <a:rPr lang="en-US" sz="5400" b="1" dirty="0">
+                <a:solidFill>
+                  <a:srgbClr val="FFFFFF"/>
+                </a:solidFill>
+                <a:latin typeface="Arial" pitchFamily="34" charset="0"/>
+                <a:ea typeface="Arial" pitchFamily="34" charset="-122"/>
+                <a:cs typeface="Arial" pitchFamily="34" charset="-120"/>
+              </a:rPr>
+              <a:t>3</a:t>
+            </a:r>
+            <a:endParaRPr lang="en-US" sz="5400" dirty="0"/>
+          </a:p>
+        </p:txBody>
+      </p:sp>
+      <p:sp>
+        <p:nvSpPr>
+          <p:cNvPr id="83" name="Benefit: One trusted record"/>
+          <p:cNvSpPr txBox="1"/>
+          <p:nvPr/>
+        </p:nvSpPr>
+        <p:spPr>
+          <a:xfrm>
+            <a:off x="14268000" y="24120000"/>
+            <a:ext cx="5424000" cy="2160000"/>
+          </a:xfrm>
+          <a:prstGeom prst="rect">
+            <a:avLst/>
+          </a:prstGeom>
+          <a:noFill/>
+          <a:ln/>
+        </p:spPr>
+        <p:txBody>
+          <a:bodyPr wrap="square" lIns="0" tIns="0" rIns="0" bIns="0" rtlCol="0" anchor="t"/>
+          <a:lstStyle/>
+          <a:p>
+            <a:pPr indent="0" marL="0">
+              <a:lnSpc>
+                <a:spcPct val="105000"/>
+              </a:lnSpc>
+              <a:spcAft>
+                <a:spcPts val="600"/>
+              </a:spcAft>
+              <a:buNone/>
+            </a:pPr>
+            <a:r>
+              <a:rPr lang="en-US" sz="3400" b="1" dirty="0">
+                <a:solidFill>
+                  <a:srgbClr val="FFFFFF"/>
+                </a:solidFill>
+                <a:latin typeface="Arial" pitchFamily="34" charset="0"/>
+                <a:ea typeface="Arial" pitchFamily="34" charset="-122"/>
+                <a:cs typeface="Arial" pitchFamily="34" charset="-120"/>
+              </a:rPr>
+              <a:t>One trusted record</a:t>
+            </a:r>
+            <a:endParaRPr lang="en-US" sz="3400" dirty="0"/>
+          </a:p>
+          <a:p>
+            <a:pPr indent="0" marL="0">
+              <a:lnSpc>
+                <a:spcPct val="105000"/>
+              </a:lnSpc>
+              <a:spcAft>
+                <a:spcPts val="600"/>
+              </a:spcAft>
+              <a:buNone/>
+            </a:pPr>
+            <a:r>
+              <a:rPr lang="en-US" sz="2800" dirty="0">
+                <a:solidFill>
+                  <a:srgbClr val="FFFFFF"/>
+                </a:solidFill>
+                <a:latin typeface="Arial" pitchFamily="34" charset="0"/>
+                <a:ea typeface="Arial" pitchFamily="34" charset="-122"/>
+                <a:cs typeface="Arial" pitchFamily="34" charset="-120"/>
+              </a:rPr>
+              <a:t>Every item on every campus, set up the way each school works.</a:t>
+            </a:r>
+            <a:endParaRPr lang="en-US" sz="3400" dirty="0"/>
+          </a:p>
+        </p:txBody>
+      </p:sp>
+      <p:sp>
+        <p:nvSpPr>
+          <p:cNvPr id="84" name="Shape 77"/>
           <p:cNvSpPr/>
           <p:nvPr/>
         </p:nvSpPr>
@@ -4990,7 +3975,7 @@
       </p:sp>
       <p:sp>
         <p:nvSpPr>
-          <p:cNvPr id="114" name="TEAM P01"/>
+          <p:cNvPr id="85" name="TEAM P01"/>
           <p:cNvSpPr txBox="1"/>
           <p:nvPr/>
         </p:nvSpPr>
@@ -5072,7 +4057,7 @@
       </p:sp>
       <p:sp>
         <p:nvSpPr>
-          <p:cNvPr id="115" name="SUPERVISOR"/>
+          <p:cNvPr id="86" name="SUPERVISOR"/>
           <p:cNvSpPr txBox="1"/>
           <p:nvPr/>
         </p:nvSpPr>
@@ -5134,7 +4119,7 @@
       </p:sp>
       <p:sp>
         <p:nvSpPr>
-          <p:cNvPr id="116" name="CLIENT"/>
+          <p:cNvPr id="87" name="CLIENT"/>
           <p:cNvSpPr txBox="1"/>
           <p:nvPr/>
         </p:nvSpPr>
@@ -5216,7 +4201,7 @@
       </p:sp>
       <p:sp>
         <p:nvSpPr>
-          <p:cNvPr id="117" name="Shape 110"/>
+          <p:cNvPr id="88" name="Shape 81"/>
           <p:cNvSpPr/>
           <p:nvPr/>
         </p:nvSpPr>
@@ -5243,7 +4228,7 @@
       </p:sp>
       <p:sp>
         <p:nvSpPr>
-          <p:cNvPr id="118" name="Category code (keep bottom-right)"/>
+          <p:cNvPr id="89" name="Category code (keep bottom-right)"/>
           <p:cNvSpPr txBox="1"/>
           <p:nvPr/>
         </p:nvSpPr>
